--- a/02_演習/Git入門_演習.pptx
+++ b/02_演習/Git入門_演習.pptx
@@ -26,6 +26,25 @@
     <p:sldId id="402" r:id="rId20"/>
     <p:sldId id="404" r:id="rId21"/>
     <p:sldId id="405" r:id="rId22"/>
+    <p:sldId id="406" r:id="rId23"/>
+    <p:sldId id="407" r:id="rId24"/>
+    <p:sldId id="408" r:id="rId25"/>
+    <p:sldId id="409" r:id="rId26"/>
+    <p:sldId id="410" r:id="rId27"/>
+    <p:sldId id="411" r:id="rId28"/>
+    <p:sldId id="412" r:id="rId29"/>
+    <p:sldId id="413" r:id="rId30"/>
+    <p:sldId id="415" r:id="rId31"/>
+    <p:sldId id="416" r:id="rId32"/>
+    <p:sldId id="414" r:id="rId33"/>
+    <p:sldId id="417" r:id="rId34"/>
+    <p:sldId id="418" r:id="rId35"/>
+    <p:sldId id="419" r:id="rId36"/>
+    <p:sldId id="420" r:id="rId37"/>
+    <p:sldId id="421" r:id="rId38"/>
+    <p:sldId id="422" r:id="rId39"/>
+    <p:sldId id="423" r:id="rId40"/>
+    <p:sldId id="424" r:id="rId41"/>
   </p:sldIdLst>
   <p:sldSz cx="12192000" cy="6858000"/>
   <p:notesSz cx="6858000" cy="9144000"/>
@@ -5443,6 +5462,1076 @@
 </p:sld>
 </file>
 
+<file path=ppt/slides/slide22.xml><?xml version="1.0" encoding="utf-8"?>
+<p:sld xmlns:a="http://schemas.openxmlformats.org/drawingml/2006/main" xmlns:r="http://schemas.openxmlformats.org/officeDocument/2006/relationships" xmlns:p="http://schemas.openxmlformats.org/presentationml/2006/main">
+  <p:cSld>
+    <p:spTree>
+      <p:nvGrpSpPr>
+        <p:cNvPr id="1" name="">
+          <a:extLst>
+            <a:ext uri="{FF2B5EF4-FFF2-40B4-BE49-F238E27FC236}">
+              <a16:creationId xmlns:a16="http://schemas.microsoft.com/office/drawing/2014/main" id="{3D848F41-100A-384C-0E6B-221D9B5A3F53}"/>
+            </a:ext>
+          </a:extLst>
+        </p:cNvPr>
+        <p:cNvGrpSpPr/>
+        <p:nvPr/>
+      </p:nvGrpSpPr>
+      <p:grpSpPr>
+        <a:xfrm>
+          <a:off x="0" y="0"/>
+          <a:ext cx="0" cy="0"/>
+          <a:chOff x="0" y="0"/>
+          <a:chExt cx="0" cy="0"/>
+        </a:xfrm>
+      </p:grpSpPr>
+      <p:pic>
+        <p:nvPicPr>
+          <p:cNvPr id="5" name="図 4">
+            <a:extLst>
+              <a:ext uri="{FF2B5EF4-FFF2-40B4-BE49-F238E27FC236}">
+                <a16:creationId xmlns:a16="http://schemas.microsoft.com/office/drawing/2014/main" id="{14C4B27D-9FFA-7708-44B7-B92A323D70D1}"/>
+              </a:ext>
+            </a:extLst>
+          </p:cNvPr>
+          <p:cNvPicPr>
+            <a:picLocks noChangeAspect="1"/>
+          </p:cNvPicPr>
+          <p:nvPr/>
+        </p:nvPicPr>
+        <p:blipFill>
+          <a:blip r:embed="rId2">
+            <a:extLst>
+              <a:ext uri="{28A0092B-C50C-407E-A947-70E740481C1C}">
+                <a14:useLocalDpi xmlns:a14="http://schemas.microsoft.com/office/drawing/2010/main" val="0"/>
+              </a:ext>
+            </a:extLst>
+          </a:blip>
+          <a:stretch>
+            <a:fillRect/>
+          </a:stretch>
+        </p:blipFill>
+        <p:spPr>
+          <a:xfrm>
+            <a:off x="3986504" y="969800"/>
+            <a:ext cx="4000500" cy="4171950"/>
+          </a:xfrm>
+          <a:prstGeom prst="rect">
+            <a:avLst/>
+          </a:prstGeom>
+        </p:spPr>
+      </p:pic>
+      <p:sp>
+        <p:nvSpPr>
+          <p:cNvPr id="4" name="正方形/長方形 3">
+            <a:extLst>
+              <a:ext uri="{FF2B5EF4-FFF2-40B4-BE49-F238E27FC236}">
+                <a16:creationId xmlns:a16="http://schemas.microsoft.com/office/drawing/2014/main" id="{4CD228D6-856D-2820-B40C-80C2E9159B12}"/>
+              </a:ext>
+            </a:extLst>
+          </p:cNvPr>
+          <p:cNvSpPr/>
+          <p:nvPr/>
+        </p:nvSpPr>
+        <p:spPr>
+          <a:xfrm flipV="1">
+            <a:off x="4505130" y="4711954"/>
+            <a:ext cx="3416560" cy="307914"/>
+          </a:xfrm>
+          <a:prstGeom prst="rect">
+            <a:avLst/>
+          </a:prstGeom>
+          <a:noFill/>
+          <a:ln w="28575">
+            <a:solidFill>
+              <a:srgbClr val="FF0000"/>
+            </a:solidFill>
+          </a:ln>
+        </p:spPr>
+        <p:style>
+          <a:lnRef idx="2">
+            <a:schemeClr val="accent6"/>
+          </a:lnRef>
+          <a:fillRef idx="1">
+            <a:schemeClr val="lt1"/>
+          </a:fillRef>
+          <a:effectRef idx="0">
+            <a:schemeClr val="accent6"/>
+          </a:effectRef>
+          <a:fontRef idx="minor">
+            <a:schemeClr val="dk1"/>
+          </a:fontRef>
+        </p:style>
+        <p:txBody>
+          <a:bodyPr rtlCol="0" anchor="ctr"/>
+          <a:lstStyle/>
+          <a:p>
+            <a:pPr algn="ctr"/>
+            <a:endParaRPr kumimoji="1" lang="ja-JP" altLang="en-US"/>
+          </a:p>
+        </p:txBody>
+      </p:sp>
+      <p:pic>
+        <p:nvPicPr>
+          <p:cNvPr id="7" name="図 6">
+            <a:extLst>
+              <a:ext uri="{FF2B5EF4-FFF2-40B4-BE49-F238E27FC236}">
+                <a16:creationId xmlns:a16="http://schemas.microsoft.com/office/drawing/2014/main" id="{D7298D6B-A02E-099E-F2E4-3956E15129D8}"/>
+              </a:ext>
+            </a:extLst>
+          </p:cNvPr>
+          <p:cNvPicPr>
+            <a:picLocks noChangeAspect="1"/>
+          </p:cNvPicPr>
+          <p:nvPr/>
+        </p:nvPicPr>
+        <p:blipFill>
+          <a:blip r:embed="rId3">
+            <a:extLst>
+              <a:ext uri="{28A0092B-C50C-407E-A947-70E740481C1C}">
+                <a14:useLocalDpi xmlns:a14="http://schemas.microsoft.com/office/drawing/2010/main" val="0"/>
+              </a:ext>
+            </a:extLst>
+          </a:blip>
+          <a:stretch>
+            <a:fillRect/>
+          </a:stretch>
+        </p:blipFill>
+        <p:spPr>
+          <a:xfrm>
+            <a:off x="5883242" y="4786409"/>
+            <a:ext cx="1190625" cy="186806"/>
+          </a:xfrm>
+          <a:prstGeom prst="rect">
+            <a:avLst/>
+          </a:prstGeom>
+        </p:spPr>
+      </p:pic>
+    </p:spTree>
+    <p:extLst>
+      <p:ext uri="{BB962C8B-B14F-4D97-AF65-F5344CB8AC3E}">
+        <p14:creationId xmlns:p14="http://schemas.microsoft.com/office/powerpoint/2010/main" val="4064898517"/>
+      </p:ext>
+    </p:extLst>
+  </p:cSld>
+  <p:clrMapOvr>
+    <a:masterClrMapping/>
+  </p:clrMapOvr>
+</p:sld>
+</file>
+
+<file path=ppt/slides/slide23.xml><?xml version="1.0" encoding="utf-8"?>
+<p:sld xmlns:a="http://schemas.openxmlformats.org/drawingml/2006/main" xmlns:r="http://schemas.openxmlformats.org/officeDocument/2006/relationships" xmlns:p="http://schemas.openxmlformats.org/presentationml/2006/main">
+  <p:cSld>
+    <p:spTree>
+      <p:nvGrpSpPr>
+        <p:cNvPr id="1" name="">
+          <a:extLst>
+            <a:ext uri="{FF2B5EF4-FFF2-40B4-BE49-F238E27FC236}">
+              <a16:creationId xmlns:a16="http://schemas.microsoft.com/office/drawing/2014/main" id="{E165B414-9E03-5046-0884-6CE3BC106CCC}"/>
+            </a:ext>
+          </a:extLst>
+        </p:cNvPr>
+        <p:cNvGrpSpPr/>
+        <p:nvPr/>
+      </p:nvGrpSpPr>
+      <p:grpSpPr>
+        <a:xfrm>
+          <a:off x="0" y="0"/>
+          <a:ext cx="0" cy="0"/>
+          <a:chOff x="0" y="0"/>
+          <a:chExt cx="0" cy="0"/>
+        </a:xfrm>
+      </p:grpSpPr>
+    </p:spTree>
+    <p:extLst>
+      <p:ext uri="{BB962C8B-B14F-4D97-AF65-F5344CB8AC3E}">
+        <p14:creationId xmlns:p14="http://schemas.microsoft.com/office/powerpoint/2010/main" val="1164689748"/>
+      </p:ext>
+    </p:extLst>
+  </p:cSld>
+  <p:clrMapOvr>
+    <a:masterClrMapping/>
+  </p:clrMapOvr>
+</p:sld>
+</file>
+
+<file path=ppt/slides/slide24.xml><?xml version="1.0" encoding="utf-8"?>
+<p:sld xmlns:a="http://schemas.openxmlformats.org/drawingml/2006/main" xmlns:r="http://schemas.openxmlformats.org/officeDocument/2006/relationships" xmlns:p="http://schemas.openxmlformats.org/presentationml/2006/main">
+  <p:cSld>
+    <p:spTree>
+      <p:nvGrpSpPr>
+        <p:cNvPr id="1" name="">
+          <a:extLst>
+            <a:ext uri="{FF2B5EF4-FFF2-40B4-BE49-F238E27FC236}">
+              <a16:creationId xmlns:a16="http://schemas.microsoft.com/office/drawing/2014/main" id="{7F5FBB26-5ACA-108F-2712-F5CF336212B5}"/>
+            </a:ext>
+          </a:extLst>
+        </p:cNvPr>
+        <p:cNvGrpSpPr/>
+        <p:nvPr/>
+      </p:nvGrpSpPr>
+      <p:grpSpPr>
+        <a:xfrm>
+          <a:off x="0" y="0"/>
+          <a:ext cx="0" cy="0"/>
+          <a:chOff x="0" y="0"/>
+          <a:chExt cx="0" cy="0"/>
+        </a:xfrm>
+      </p:grpSpPr>
+      <p:pic>
+        <p:nvPicPr>
+          <p:cNvPr id="3" name="図 2">
+            <a:extLst>
+              <a:ext uri="{FF2B5EF4-FFF2-40B4-BE49-F238E27FC236}">
+                <a16:creationId xmlns:a16="http://schemas.microsoft.com/office/drawing/2014/main" id="{6CCD5011-02AF-517D-68FC-DAEE945C0514}"/>
+              </a:ext>
+            </a:extLst>
+          </p:cNvPr>
+          <p:cNvPicPr>
+            <a:picLocks noChangeAspect="1"/>
+          </p:cNvPicPr>
+          <p:nvPr/>
+        </p:nvPicPr>
+        <p:blipFill>
+          <a:blip r:embed="rId2">
+            <a:extLst>
+              <a:ext uri="{28A0092B-C50C-407E-A947-70E740481C1C}">
+                <a14:useLocalDpi xmlns:a14="http://schemas.microsoft.com/office/drawing/2010/main" val="0"/>
+              </a:ext>
+            </a:extLst>
+          </a:blip>
+          <a:stretch>
+            <a:fillRect/>
+          </a:stretch>
+        </p:blipFill>
+        <p:spPr>
+          <a:xfrm>
+            <a:off x="4100512" y="747712"/>
+            <a:ext cx="3990975" cy="5362575"/>
+          </a:xfrm>
+          <a:prstGeom prst="rect">
+            <a:avLst/>
+          </a:prstGeom>
+        </p:spPr>
+      </p:pic>
+      <p:sp>
+        <p:nvSpPr>
+          <p:cNvPr id="4" name="正方形/長方形 3">
+            <a:extLst>
+              <a:ext uri="{FF2B5EF4-FFF2-40B4-BE49-F238E27FC236}">
+                <a16:creationId xmlns:a16="http://schemas.microsoft.com/office/drawing/2014/main" id="{13B6CEB9-0082-359D-81A1-F61B7E3D30A3}"/>
+              </a:ext>
+            </a:extLst>
+          </p:cNvPr>
+          <p:cNvSpPr/>
+          <p:nvPr/>
+        </p:nvSpPr>
+        <p:spPr>
+          <a:xfrm flipV="1">
+            <a:off x="4544008" y="5850293"/>
+            <a:ext cx="578498" cy="241332"/>
+          </a:xfrm>
+          <a:prstGeom prst="rect">
+            <a:avLst/>
+          </a:prstGeom>
+          <a:noFill/>
+          <a:ln w="28575">
+            <a:solidFill>
+              <a:srgbClr val="FF0000"/>
+            </a:solidFill>
+          </a:ln>
+        </p:spPr>
+        <p:style>
+          <a:lnRef idx="2">
+            <a:schemeClr val="accent6"/>
+          </a:lnRef>
+          <a:fillRef idx="1">
+            <a:schemeClr val="lt1"/>
+          </a:fillRef>
+          <a:effectRef idx="0">
+            <a:schemeClr val="accent6"/>
+          </a:effectRef>
+          <a:fontRef idx="minor">
+            <a:schemeClr val="dk1"/>
+          </a:fontRef>
+        </p:style>
+        <p:txBody>
+          <a:bodyPr rtlCol="0" anchor="ctr"/>
+          <a:lstStyle/>
+          <a:p>
+            <a:pPr algn="ctr"/>
+            <a:endParaRPr kumimoji="1" lang="ja-JP" altLang="en-US"/>
+          </a:p>
+        </p:txBody>
+      </p:sp>
+      <p:pic>
+        <p:nvPicPr>
+          <p:cNvPr id="5" name="図 4">
+            <a:extLst>
+              <a:ext uri="{FF2B5EF4-FFF2-40B4-BE49-F238E27FC236}">
+                <a16:creationId xmlns:a16="http://schemas.microsoft.com/office/drawing/2014/main" id="{0EE578AC-1A2A-9EDF-10A7-AA275B6165D8}"/>
+              </a:ext>
+            </a:extLst>
+          </p:cNvPr>
+          <p:cNvPicPr>
+            <a:picLocks noChangeAspect="1"/>
+          </p:cNvPicPr>
+          <p:nvPr/>
+        </p:nvPicPr>
+        <p:blipFill>
+          <a:blip r:embed="rId3">
+            <a:extLst>
+              <a:ext uri="{28A0092B-C50C-407E-A947-70E740481C1C}">
+                <a14:useLocalDpi xmlns:a14="http://schemas.microsoft.com/office/drawing/2010/main" val="0"/>
+              </a:ext>
+            </a:extLst>
+          </a:blip>
+          <a:stretch>
+            <a:fillRect/>
+          </a:stretch>
+        </p:blipFill>
+        <p:spPr>
+          <a:xfrm>
+            <a:off x="5985879" y="3528132"/>
+            <a:ext cx="1190625" cy="186806"/>
+          </a:xfrm>
+          <a:prstGeom prst="rect">
+            <a:avLst/>
+          </a:prstGeom>
+        </p:spPr>
+      </p:pic>
+    </p:spTree>
+    <p:extLst>
+      <p:ext uri="{BB962C8B-B14F-4D97-AF65-F5344CB8AC3E}">
+        <p14:creationId xmlns:p14="http://schemas.microsoft.com/office/powerpoint/2010/main" val="3894328620"/>
+      </p:ext>
+    </p:extLst>
+  </p:cSld>
+  <p:clrMapOvr>
+    <a:masterClrMapping/>
+  </p:clrMapOvr>
+</p:sld>
+</file>
+
+<file path=ppt/slides/slide25.xml><?xml version="1.0" encoding="utf-8"?>
+<p:sld xmlns:a="http://schemas.openxmlformats.org/drawingml/2006/main" xmlns:r="http://schemas.openxmlformats.org/officeDocument/2006/relationships" xmlns:p="http://schemas.openxmlformats.org/presentationml/2006/main">
+  <p:cSld>
+    <p:spTree>
+      <p:nvGrpSpPr>
+        <p:cNvPr id="1" name="">
+          <a:extLst>
+            <a:ext uri="{FF2B5EF4-FFF2-40B4-BE49-F238E27FC236}">
+              <a16:creationId xmlns:a16="http://schemas.microsoft.com/office/drawing/2014/main" id="{060685EE-1DFC-F4F1-380D-CB47846B240F}"/>
+            </a:ext>
+          </a:extLst>
+        </p:cNvPr>
+        <p:cNvGrpSpPr/>
+        <p:nvPr/>
+      </p:nvGrpSpPr>
+      <p:grpSpPr>
+        <a:xfrm>
+          <a:off x="0" y="0"/>
+          <a:ext cx="0" cy="0"/>
+          <a:chOff x="0" y="0"/>
+          <a:chExt cx="0" cy="0"/>
+        </a:xfrm>
+      </p:grpSpPr>
+      <p:pic>
+        <p:nvPicPr>
+          <p:cNvPr id="7" name="図 6">
+            <a:extLst>
+              <a:ext uri="{FF2B5EF4-FFF2-40B4-BE49-F238E27FC236}">
+                <a16:creationId xmlns:a16="http://schemas.microsoft.com/office/drawing/2014/main" id="{5E0C6232-9B33-E166-9B3F-F3F3AF03868E}"/>
+              </a:ext>
+            </a:extLst>
+          </p:cNvPr>
+          <p:cNvPicPr>
+            <a:picLocks noChangeAspect="1"/>
+          </p:cNvPicPr>
+          <p:nvPr/>
+        </p:nvPicPr>
+        <p:blipFill>
+          <a:blip r:embed="rId2">
+            <a:extLst>
+              <a:ext uri="{28A0092B-C50C-407E-A947-70E740481C1C}">
+                <a14:useLocalDpi xmlns:a14="http://schemas.microsoft.com/office/drawing/2010/main" val="0"/>
+              </a:ext>
+            </a:extLst>
+          </a:blip>
+          <a:stretch>
+            <a:fillRect/>
+          </a:stretch>
+        </p:blipFill>
+        <p:spPr>
+          <a:xfrm>
+            <a:off x="1074284" y="2306896"/>
+            <a:ext cx="10696575" cy="1609725"/>
+          </a:xfrm>
+          <a:prstGeom prst="rect">
+            <a:avLst/>
+          </a:prstGeom>
+        </p:spPr>
+      </p:pic>
+      <p:sp>
+        <p:nvSpPr>
+          <p:cNvPr id="10" name="正方形/長方形 9">
+            <a:extLst>
+              <a:ext uri="{FF2B5EF4-FFF2-40B4-BE49-F238E27FC236}">
+                <a16:creationId xmlns:a16="http://schemas.microsoft.com/office/drawing/2014/main" id="{06A95CF0-0B16-3B7C-886B-37050A609542}"/>
+              </a:ext>
+            </a:extLst>
+          </p:cNvPr>
+          <p:cNvSpPr/>
+          <p:nvPr/>
+        </p:nvSpPr>
+        <p:spPr>
+          <a:xfrm flipV="1">
+            <a:off x="4693297" y="2780521"/>
+            <a:ext cx="6997959" cy="307911"/>
+          </a:xfrm>
+          <a:prstGeom prst="rect">
+            <a:avLst/>
+          </a:prstGeom>
+          <a:noFill/>
+          <a:ln w="28575">
+            <a:solidFill>
+              <a:srgbClr val="FF0000"/>
+            </a:solidFill>
+          </a:ln>
+        </p:spPr>
+        <p:style>
+          <a:lnRef idx="2">
+            <a:schemeClr val="accent6"/>
+          </a:lnRef>
+          <a:fillRef idx="1">
+            <a:schemeClr val="lt1"/>
+          </a:fillRef>
+          <a:effectRef idx="0">
+            <a:schemeClr val="accent6"/>
+          </a:effectRef>
+          <a:fontRef idx="minor">
+            <a:schemeClr val="dk1"/>
+          </a:fontRef>
+        </p:style>
+        <p:txBody>
+          <a:bodyPr rtlCol="0" anchor="ctr"/>
+          <a:lstStyle/>
+          <a:p>
+            <a:pPr algn="ctr"/>
+            <a:endParaRPr kumimoji="1" lang="ja-JP" altLang="en-US"/>
+          </a:p>
+        </p:txBody>
+      </p:sp>
+    </p:spTree>
+    <p:extLst>
+      <p:ext uri="{BB962C8B-B14F-4D97-AF65-F5344CB8AC3E}">
+        <p14:creationId xmlns:p14="http://schemas.microsoft.com/office/powerpoint/2010/main" val="449604018"/>
+      </p:ext>
+    </p:extLst>
+  </p:cSld>
+  <p:clrMapOvr>
+    <a:masterClrMapping/>
+  </p:clrMapOvr>
+</p:sld>
+</file>
+
+<file path=ppt/slides/slide26.xml><?xml version="1.0" encoding="utf-8"?>
+<p:sld xmlns:a="http://schemas.openxmlformats.org/drawingml/2006/main" xmlns:r="http://schemas.openxmlformats.org/officeDocument/2006/relationships" xmlns:p="http://schemas.openxmlformats.org/presentationml/2006/main">
+  <p:cSld>
+    <p:spTree>
+      <p:nvGrpSpPr>
+        <p:cNvPr id="1" name="">
+          <a:extLst>
+            <a:ext uri="{FF2B5EF4-FFF2-40B4-BE49-F238E27FC236}">
+              <a16:creationId xmlns:a16="http://schemas.microsoft.com/office/drawing/2014/main" id="{182FC91A-1284-3E0E-7228-EC7D76A15979}"/>
+            </a:ext>
+          </a:extLst>
+        </p:cNvPr>
+        <p:cNvGrpSpPr/>
+        <p:nvPr/>
+      </p:nvGrpSpPr>
+      <p:grpSpPr>
+        <a:xfrm>
+          <a:off x="0" y="0"/>
+          <a:ext cx="0" cy="0"/>
+          <a:chOff x="0" y="0"/>
+          <a:chExt cx="0" cy="0"/>
+        </a:xfrm>
+      </p:grpSpPr>
+      <p:pic>
+        <p:nvPicPr>
+          <p:cNvPr id="9" name="図 8">
+            <a:extLst>
+              <a:ext uri="{FF2B5EF4-FFF2-40B4-BE49-F238E27FC236}">
+                <a16:creationId xmlns:a16="http://schemas.microsoft.com/office/drawing/2014/main" id="{D52733FF-BCE8-A679-924E-7D726CB2A552}"/>
+              </a:ext>
+            </a:extLst>
+          </p:cNvPr>
+          <p:cNvPicPr>
+            <a:picLocks noChangeAspect="1"/>
+          </p:cNvPicPr>
+          <p:nvPr/>
+        </p:nvPicPr>
+        <p:blipFill>
+          <a:blip r:embed="rId2">
+            <a:extLst>
+              <a:ext uri="{28A0092B-C50C-407E-A947-70E740481C1C}">
+                <a14:useLocalDpi xmlns:a14="http://schemas.microsoft.com/office/drawing/2010/main" val="0"/>
+              </a:ext>
+            </a:extLst>
+          </a:blip>
+          <a:stretch>
+            <a:fillRect/>
+          </a:stretch>
+        </p:blipFill>
+        <p:spPr>
+          <a:xfrm>
+            <a:off x="1117274" y="2654976"/>
+            <a:ext cx="10668000" cy="1400175"/>
+          </a:xfrm>
+          <a:prstGeom prst="rect">
+            <a:avLst/>
+          </a:prstGeom>
+        </p:spPr>
+      </p:pic>
+      <p:sp>
+        <p:nvSpPr>
+          <p:cNvPr id="2" name="正方形/長方形 1">
+            <a:extLst>
+              <a:ext uri="{FF2B5EF4-FFF2-40B4-BE49-F238E27FC236}">
+                <a16:creationId xmlns:a16="http://schemas.microsoft.com/office/drawing/2014/main" id="{D5874439-EC18-9C05-4672-846F54C27492}"/>
+              </a:ext>
+            </a:extLst>
+          </p:cNvPr>
+          <p:cNvSpPr/>
+          <p:nvPr/>
+        </p:nvSpPr>
+        <p:spPr>
+          <a:xfrm flipV="1">
+            <a:off x="4693297" y="2780521"/>
+            <a:ext cx="6997959" cy="307911"/>
+          </a:xfrm>
+          <a:prstGeom prst="rect">
+            <a:avLst/>
+          </a:prstGeom>
+          <a:noFill/>
+          <a:ln w="28575">
+            <a:solidFill>
+              <a:srgbClr val="FF0000"/>
+            </a:solidFill>
+          </a:ln>
+        </p:spPr>
+        <p:style>
+          <a:lnRef idx="2">
+            <a:schemeClr val="accent6"/>
+          </a:lnRef>
+          <a:fillRef idx="1">
+            <a:schemeClr val="lt1"/>
+          </a:fillRef>
+          <a:effectRef idx="0">
+            <a:schemeClr val="accent6"/>
+          </a:effectRef>
+          <a:fontRef idx="minor">
+            <a:schemeClr val="dk1"/>
+          </a:fontRef>
+        </p:style>
+        <p:txBody>
+          <a:bodyPr rtlCol="0" anchor="ctr"/>
+          <a:lstStyle/>
+          <a:p>
+            <a:pPr algn="ctr"/>
+            <a:endParaRPr kumimoji="1" lang="ja-JP" altLang="en-US"/>
+          </a:p>
+        </p:txBody>
+      </p:sp>
+    </p:spTree>
+    <p:extLst>
+      <p:ext uri="{BB962C8B-B14F-4D97-AF65-F5344CB8AC3E}">
+        <p14:creationId xmlns:p14="http://schemas.microsoft.com/office/powerpoint/2010/main" val="2827070427"/>
+      </p:ext>
+    </p:extLst>
+  </p:cSld>
+  <p:clrMapOvr>
+    <a:masterClrMapping/>
+  </p:clrMapOvr>
+</p:sld>
+</file>
+
+<file path=ppt/slides/slide27.xml><?xml version="1.0" encoding="utf-8"?>
+<p:sld xmlns:a="http://schemas.openxmlformats.org/drawingml/2006/main" xmlns:r="http://schemas.openxmlformats.org/officeDocument/2006/relationships" xmlns:p="http://schemas.openxmlformats.org/presentationml/2006/main">
+  <p:cSld>
+    <p:spTree>
+      <p:nvGrpSpPr>
+        <p:cNvPr id="1" name="">
+          <a:extLst>
+            <a:ext uri="{FF2B5EF4-FFF2-40B4-BE49-F238E27FC236}">
+              <a16:creationId xmlns:a16="http://schemas.microsoft.com/office/drawing/2014/main" id="{A01C3480-7187-1A5B-24A5-0DE87ED7B05A}"/>
+            </a:ext>
+          </a:extLst>
+        </p:cNvPr>
+        <p:cNvGrpSpPr/>
+        <p:nvPr/>
+      </p:nvGrpSpPr>
+      <p:grpSpPr>
+        <a:xfrm>
+          <a:off x="0" y="0"/>
+          <a:ext cx="0" cy="0"/>
+          <a:chOff x="0" y="0"/>
+          <a:chExt cx="0" cy="0"/>
+        </a:xfrm>
+      </p:grpSpPr>
+      <p:pic>
+        <p:nvPicPr>
+          <p:cNvPr id="8" name="図 7">
+            <a:extLst>
+              <a:ext uri="{FF2B5EF4-FFF2-40B4-BE49-F238E27FC236}">
+                <a16:creationId xmlns:a16="http://schemas.microsoft.com/office/drawing/2014/main" id="{42E9B881-F36D-EC7C-467E-77BFDF7AD91F}"/>
+              </a:ext>
+            </a:extLst>
+          </p:cNvPr>
+          <p:cNvPicPr>
+            <a:picLocks noChangeAspect="1"/>
+          </p:cNvPicPr>
+          <p:nvPr/>
+        </p:nvPicPr>
+        <p:blipFill>
+          <a:blip r:embed="rId2">
+            <a:extLst>
+              <a:ext uri="{28A0092B-C50C-407E-A947-70E740481C1C}">
+                <a14:useLocalDpi xmlns:a14="http://schemas.microsoft.com/office/drawing/2010/main" val="0"/>
+              </a:ext>
+            </a:extLst>
+          </a:blip>
+          <a:stretch>
+            <a:fillRect/>
+          </a:stretch>
+        </p:blipFill>
+        <p:spPr>
+          <a:xfrm>
+            <a:off x="4090987" y="747712"/>
+            <a:ext cx="4010025" cy="5362575"/>
+          </a:xfrm>
+          <a:prstGeom prst="rect">
+            <a:avLst/>
+          </a:prstGeom>
+        </p:spPr>
+      </p:pic>
+      <p:sp>
+        <p:nvSpPr>
+          <p:cNvPr id="5" name="正方形/長方形 4">
+            <a:extLst>
+              <a:ext uri="{FF2B5EF4-FFF2-40B4-BE49-F238E27FC236}">
+                <a16:creationId xmlns:a16="http://schemas.microsoft.com/office/drawing/2014/main" id="{B3FC868A-AF7B-102B-3797-C27B3DFC86E6}"/>
+              </a:ext>
+            </a:extLst>
+          </p:cNvPr>
+          <p:cNvSpPr/>
+          <p:nvPr/>
+        </p:nvSpPr>
+        <p:spPr>
+          <a:xfrm flipV="1">
+            <a:off x="4516017" y="5840960"/>
+            <a:ext cx="774441" cy="250276"/>
+          </a:xfrm>
+          <a:prstGeom prst="rect">
+            <a:avLst/>
+          </a:prstGeom>
+          <a:noFill/>
+          <a:ln w="28575">
+            <a:solidFill>
+              <a:srgbClr val="FF0000"/>
+            </a:solidFill>
+          </a:ln>
+        </p:spPr>
+        <p:style>
+          <a:lnRef idx="2">
+            <a:schemeClr val="accent6"/>
+          </a:lnRef>
+          <a:fillRef idx="1">
+            <a:schemeClr val="lt1"/>
+          </a:fillRef>
+          <a:effectRef idx="0">
+            <a:schemeClr val="accent6"/>
+          </a:effectRef>
+          <a:fontRef idx="minor">
+            <a:schemeClr val="dk1"/>
+          </a:fontRef>
+        </p:style>
+        <p:txBody>
+          <a:bodyPr rtlCol="0" anchor="ctr"/>
+          <a:lstStyle/>
+          <a:p>
+            <a:pPr algn="ctr"/>
+            <a:endParaRPr kumimoji="1" lang="ja-JP" altLang="en-US"/>
+          </a:p>
+        </p:txBody>
+      </p:sp>
+      <p:pic>
+        <p:nvPicPr>
+          <p:cNvPr id="6" name="図 5">
+            <a:extLst>
+              <a:ext uri="{FF2B5EF4-FFF2-40B4-BE49-F238E27FC236}">
+                <a16:creationId xmlns:a16="http://schemas.microsoft.com/office/drawing/2014/main" id="{8752FF80-C972-25B5-8809-BE2C6A10E500}"/>
+              </a:ext>
+            </a:extLst>
+          </p:cNvPr>
+          <p:cNvPicPr>
+            <a:picLocks noChangeAspect="1"/>
+          </p:cNvPicPr>
+          <p:nvPr/>
+        </p:nvPicPr>
+        <p:blipFill>
+          <a:blip r:embed="rId3">
+            <a:extLst>
+              <a:ext uri="{28A0092B-C50C-407E-A947-70E740481C1C}">
+                <a14:useLocalDpi xmlns:a14="http://schemas.microsoft.com/office/drawing/2010/main" val="0"/>
+              </a:ext>
+            </a:extLst>
+          </a:blip>
+          <a:stretch>
+            <a:fillRect/>
+          </a:stretch>
+        </p:blipFill>
+        <p:spPr>
+          <a:xfrm>
+            <a:off x="5985879" y="3518801"/>
+            <a:ext cx="1190625" cy="186806"/>
+          </a:xfrm>
+          <a:prstGeom prst="rect">
+            <a:avLst/>
+          </a:prstGeom>
+        </p:spPr>
+      </p:pic>
+    </p:spTree>
+    <p:extLst>
+      <p:ext uri="{BB962C8B-B14F-4D97-AF65-F5344CB8AC3E}">
+        <p14:creationId xmlns:p14="http://schemas.microsoft.com/office/powerpoint/2010/main" val="1832762603"/>
+      </p:ext>
+    </p:extLst>
+  </p:cSld>
+  <p:clrMapOvr>
+    <a:masterClrMapping/>
+  </p:clrMapOvr>
+</p:sld>
+</file>
+
+<file path=ppt/slides/slide28.xml><?xml version="1.0" encoding="utf-8"?>
+<p:sld xmlns:a="http://schemas.openxmlformats.org/drawingml/2006/main" xmlns:r="http://schemas.openxmlformats.org/officeDocument/2006/relationships" xmlns:p="http://schemas.openxmlformats.org/presentationml/2006/main">
+  <p:cSld>
+    <p:spTree>
+      <p:nvGrpSpPr>
+        <p:cNvPr id="1" name="">
+          <a:extLst>
+            <a:ext uri="{FF2B5EF4-FFF2-40B4-BE49-F238E27FC236}">
+              <a16:creationId xmlns:a16="http://schemas.microsoft.com/office/drawing/2014/main" id="{AF010A56-A5CA-E0F4-36C3-11FD0A0B918B}"/>
+            </a:ext>
+          </a:extLst>
+        </p:cNvPr>
+        <p:cNvGrpSpPr/>
+        <p:nvPr/>
+      </p:nvGrpSpPr>
+      <p:grpSpPr>
+        <a:xfrm>
+          <a:off x="0" y="0"/>
+          <a:ext cx="0" cy="0"/>
+          <a:chOff x="0" y="0"/>
+          <a:chExt cx="0" cy="0"/>
+        </a:xfrm>
+      </p:grpSpPr>
+      <p:pic>
+        <p:nvPicPr>
+          <p:cNvPr id="3" name="図 2">
+            <a:extLst>
+              <a:ext uri="{FF2B5EF4-FFF2-40B4-BE49-F238E27FC236}">
+                <a16:creationId xmlns:a16="http://schemas.microsoft.com/office/drawing/2014/main" id="{60027A17-B864-4749-B48D-6C044040322B}"/>
+              </a:ext>
+            </a:extLst>
+          </p:cNvPr>
+          <p:cNvPicPr>
+            <a:picLocks noChangeAspect="1"/>
+          </p:cNvPicPr>
+          <p:nvPr/>
+        </p:nvPicPr>
+        <p:blipFill>
+          <a:blip r:embed="rId2">
+            <a:extLst>
+              <a:ext uri="{28A0092B-C50C-407E-A947-70E740481C1C}">
+                <a14:useLocalDpi xmlns:a14="http://schemas.microsoft.com/office/drawing/2010/main" val="0"/>
+              </a:ext>
+            </a:extLst>
+          </a:blip>
+          <a:stretch>
+            <a:fillRect/>
+          </a:stretch>
+        </p:blipFill>
+        <p:spPr>
+          <a:xfrm>
+            <a:off x="2682066" y="1814512"/>
+            <a:ext cx="4010025" cy="3228975"/>
+          </a:xfrm>
+          <a:prstGeom prst="rect">
+            <a:avLst/>
+          </a:prstGeom>
+        </p:spPr>
+      </p:pic>
+      <p:sp>
+        <p:nvSpPr>
+          <p:cNvPr id="9" name="正方形/長方形 8">
+            <a:extLst>
+              <a:ext uri="{FF2B5EF4-FFF2-40B4-BE49-F238E27FC236}">
+                <a16:creationId xmlns:a16="http://schemas.microsoft.com/office/drawing/2014/main" id="{5763A20E-AF6A-4060-CF26-7A22DBF3F444}"/>
+              </a:ext>
+            </a:extLst>
+          </p:cNvPr>
+          <p:cNvSpPr/>
+          <p:nvPr/>
+        </p:nvSpPr>
+        <p:spPr>
+          <a:xfrm flipV="1">
+            <a:off x="3275045" y="4665303"/>
+            <a:ext cx="3349690" cy="289252"/>
+          </a:xfrm>
+          <a:prstGeom prst="rect">
+            <a:avLst/>
+          </a:prstGeom>
+          <a:noFill/>
+          <a:ln w="28575">
+            <a:solidFill>
+              <a:srgbClr val="FF0000"/>
+            </a:solidFill>
+          </a:ln>
+        </p:spPr>
+        <p:style>
+          <a:lnRef idx="2">
+            <a:schemeClr val="accent6"/>
+          </a:lnRef>
+          <a:fillRef idx="1">
+            <a:schemeClr val="lt1"/>
+          </a:fillRef>
+          <a:effectRef idx="0">
+            <a:schemeClr val="accent6"/>
+          </a:effectRef>
+          <a:fontRef idx="minor">
+            <a:schemeClr val="dk1"/>
+          </a:fontRef>
+        </p:style>
+        <p:txBody>
+          <a:bodyPr rtlCol="0" anchor="ctr"/>
+          <a:lstStyle/>
+          <a:p>
+            <a:pPr algn="ctr"/>
+            <a:endParaRPr kumimoji="1" lang="ja-JP" altLang="en-US"/>
+          </a:p>
+        </p:txBody>
+      </p:sp>
+    </p:spTree>
+    <p:extLst>
+      <p:ext uri="{BB962C8B-B14F-4D97-AF65-F5344CB8AC3E}">
+        <p14:creationId xmlns:p14="http://schemas.microsoft.com/office/powerpoint/2010/main" val="2287816522"/>
+      </p:ext>
+    </p:extLst>
+  </p:cSld>
+  <p:clrMapOvr>
+    <a:masterClrMapping/>
+  </p:clrMapOvr>
+</p:sld>
+</file>
+
+<file path=ppt/slides/slide29.xml><?xml version="1.0" encoding="utf-8"?>
+<p:sld xmlns:a="http://schemas.openxmlformats.org/drawingml/2006/main" xmlns:r="http://schemas.openxmlformats.org/officeDocument/2006/relationships" xmlns:p="http://schemas.openxmlformats.org/presentationml/2006/main">
+  <p:cSld>
+    <p:spTree>
+      <p:nvGrpSpPr>
+        <p:cNvPr id="1" name="">
+          <a:extLst>
+            <a:ext uri="{FF2B5EF4-FFF2-40B4-BE49-F238E27FC236}">
+              <a16:creationId xmlns:a16="http://schemas.microsoft.com/office/drawing/2014/main" id="{DDB07A63-B890-A170-6C84-6D1A4197E236}"/>
+            </a:ext>
+          </a:extLst>
+        </p:cNvPr>
+        <p:cNvGrpSpPr/>
+        <p:nvPr/>
+      </p:nvGrpSpPr>
+      <p:grpSpPr>
+        <a:xfrm>
+          <a:off x="0" y="0"/>
+          <a:ext cx="0" cy="0"/>
+          <a:chOff x="0" y="0"/>
+          <a:chExt cx="0" cy="0"/>
+        </a:xfrm>
+      </p:grpSpPr>
+      <p:pic>
+        <p:nvPicPr>
+          <p:cNvPr id="5" name="図 4">
+            <a:extLst>
+              <a:ext uri="{FF2B5EF4-FFF2-40B4-BE49-F238E27FC236}">
+                <a16:creationId xmlns:a16="http://schemas.microsoft.com/office/drawing/2014/main" id="{3EF0AA85-207F-23BB-F91B-43DF2FD560C8}"/>
+              </a:ext>
+            </a:extLst>
+          </p:cNvPr>
+          <p:cNvPicPr>
+            <a:picLocks noChangeAspect="1"/>
+          </p:cNvPicPr>
+          <p:nvPr/>
+        </p:nvPicPr>
+        <p:blipFill>
+          <a:blip r:embed="rId2">
+            <a:extLst>
+              <a:ext uri="{28A0092B-C50C-407E-A947-70E740481C1C}">
+                <a14:useLocalDpi xmlns:a14="http://schemas.microsoft.com/office/drawing/2010/main" val="0"/>
+              </a:ext>
+            </a:extLst>
+          </a:blip>
+          <a:stretch>
+            <a:fillRect/>
+          </a:stretch>
+        </p:blipFill>
+        <p:spPr>
+          <a:xfrm>
+            <a:off x="1593478" y="2028825"/>
+            <a:ext cx="4319878" cy="2981324"/>
+          </a:xfrm>
+          <a:prstGeom prst="rect">
+            <a:avLst/>
+          </a:prstGeom>
+        </p:spPr>
+      </p:pic>
+      <p:sp>
+        <p:nvSpPr>
+          <p:cNvPr id="3" name="正方形/長方形 2">
+            <a:extLst>
+              <a:ext uri="{FF2B5EF4-FFF2-40B4-BE49-F238E27FC236}">
+                <a16:creationId xmlns:a16="http://schemas.microsoft.com/office/drawing/2014/main" id="{503538D2-7F6B-BAF3-5086-25DAF49ED7C2}"/>
+              </a:ext>
+            </a:extLst>
+          </p:cNvPr>
+          <p:cNvSpPr/>
+          <p:nvPr/>
+        </p:nvSpPr>
+        <p:spPr>
+          <a:xfrm flipV="1">
+            <a:off x="2141844" y="3665958"/>
+            <a:ext cx="3659607" cy="539329"/>
+          </a:xfrm>
+          <a:prstGeom prst="rect">
+            <a:avLst/>
+          </a:prstGeom>
+          <a:noFill/>
+          <a:ln w="28575">
+            <a:solidFill>
+              <a:srgbClr val="FF0000"/>
+            </a:solidFill>
+          </a:ln>
+        </p:spPr>
+        <p:style>
+          <a:lnRef idx="2">
+            <a:schemeClr val="accent6"/>
+          </a:lnRef>
+          <a:fillRef idx="1">
+            <a:schemeClr val="lt1"/>
+          </a:fillRef>
+          <a:effectRef idx="0">
+            <a:schemeClr val="accent6"/>
+          </a:effectRef>
+          <a:fontRef idx="minor">
+            <a:schemeClr val="dk1"/>
+          </a:fontRef>
+        </p:style>
+        <p:txBody>
+          <a:bodyPr rtlCol="0" anchor="ctr"/>
+          <a:lstStyle/>
+          <a:p>
+            <a:pPr algn="ctr"/>
+            <a:endParaRPr kumimoji="1" lang="ja-JP" altLang="en-US"/>
+          </a:p>
+        </p:txBody>
+      </p:sp>
+      <p:pic>
+        <p:nvPicPr>
+          <p:cNvPr id="8" name="図 7">
+            <a:extLst>
+              <a:ext uri="{FF2B5EF4-FFF2-40B4-BE49-F238E27FC236}">
+                <a16:creationId xmlns:a16="http://schemas.microsoft.com/office/drawing/2014/main" id="{F9E35229-5600-FFAE-0CBC-C3AC14713389}"/>
+              </a:ext>
+            </a:extLst>
+          </p:cNvPr>
+          <p:cNvPicPr>
+            <a:picLocks noChangeAspect="1"/>
+          </p:cNvPicPr>
+          <p:nvPr/>
+        </p:nvPicPr>
+        <p:blipFill>
+          <a:blip r:embed="rId3">
+            <a:extLst>
+              <a:ext uri="{28A0092B-C50C-407E-A947-70E740481C1C}">
+                <a14:useLocalDpi xmlns:a14="http://schemas.microsoft.com/office/drawing/2010/main" val="0"/>
+              </a:ext>
+            </a:extLst>
+          </a:blip>
+          <a:stretch>
+            <a:fillRect/>
+          </a:stretch>
+        </p:blipFill>
+        <p:spPr>
+          <a:xfrm>
+            <a:off x="3660370" y="4615640"/>
+            <a:ext cx="1190625" cy="186806"/>
+          </a:xfrm>
+          <a:prstGeom prst="rect">
+            <a:avLst/>
+          </a:prstGeom>
+        </p:spPr>
+      </p:pic>
+      <p:pic>
+        <p:nvPicPr>
+          <p:cNvPr id="16" name="図 15">
+            <a:extLst>
+              <a:ext uri="{FF2B5EF4-FFF2-40B4-BE49-F238E27FC236}">
+                <a16:creationId xmlns:a16="http://schemas.microsoft.com/office/drawing/2014/main" id="{BC1C28EF-2DD2-95EC-2A6B-1C913FC00C8D}"/>
+              </a:ext>
+            </a:extLst>
+          </p:cNvPr>
+          <p:cNvPicPr>
+            <a:picLocks noChangeAspect="1"/>
+          </p:cNvPicPr>
+          <p:nvPr/>
+        </p:nvPicPr>
+        <p:blipFill>
+          <a:blip r:embed="rId4">
+            <a:extLst>
+              <a:ext uri="{28A0092B-C50C-407E-A947-70E740481C1C}">
+                <a14:useLocalDpi xmlns:a14="http://schemas.microsoft.com/office/drawing/2010/main" val="0"/>
+              </a:ext>
+            </a:extLst>
+          </a:blip>
+          <a:stretch>
+            <a:fillRect/>
+          </a:stretch>
+        </p:blipFill>
+        <p:spPr>
+          <a:xfrm>
+            <a:off x="2494092" y="2861096"/>
+            <a:ext cx="1400175" cy="218006"/>
+          </a:xfrm>
+          <a:prstGeom prst="rect">
+            <a:avLst/>
+          </a:prstGeom>
+        </p:spPr>
+      </p:pic>
+    </p:spTree>
+    <p:extLst>
+      <p:ext uri="{BB962C8B-B14F-4D97-AF65-F5344CB8AC3E}">
+        <p14:creationId xmlns:p14="http://schemas.microsoft.com/office/powerpoint/2010/main" val="3506024540"/>
+      </p:ext>
+    </p:extLst>
+  </p:cSld>
+  <p:clrMapOvr>
+    <a:masterClrMapping/>
+  </p:clrMapOvr>
+</p:sld>
+</file>
+
 <file path=ppt/slides/slide3.xml><?xml version="1.0" encoding="utf-8"?>
 <p:sld xmlns:a="http://schemas.openxmlformats.org/drawingml/2006/main" xmlns:r="http://schemas.openxmlformats.org/officeDocument/2006/relationships" xmlns:p="http://schemas.openxmlformats.org/presentationml/2006/main">
   <p:cSld>
@@ -5506,6 +6595,1606 @@
     <p:extLst>
       <p:ext uri="{BB962C8B-B14F-4D97-AF65-F5344CB8AC3E}">
         <p14:creationId xmlns:p14="http://schemas.microsoft.com/office/powerpoint/2010/main" val="3824441708"/>
+      </p:ext>
+    </p:extLst>
+  </p:cSld>
+  <p:clrMapOvr>
+    <a:masterClrMapping/>
+  </p:clrMapOvr>
+</p:sld>
+</file>
+
+<file path=ppt/slides/slide30.xml><?xml version="1.0" encoding="utf-8"?>
+<p:sld xmlns:a="http://schemas.openxmlformats.org/drawingml/2006/main" xmlns:r="http://schemas.openxmlformats.org/officeDocument/2006/relationships" xmlns:p="http://schemas.openxmlformats.org/presentationml/2006/main">
+  <p:cSld>
+    <p:spTree>
+      <p:nvGrpSpPr>
+        <p:cNvPr id="1" name="">
+          <a:extLst>
+            <a:ext uri="{FF2B5EF4-FFF2-40B4-BE49-F238E27FC236}">
+              <a16:creationId xmlns:a16="http://schemas.microsoft.com/office/drawing/2014/main" id="{D5D91B17-D408-8653-C2DD-C49EE4132428}"/>
+            </a:ext>
+          </a:extLst>
+        </p:cNvPr>
+        <p:cNvGrpSpPr/>
+        <p:nvPr/>
+      </p:nvGrpSpPr>
+      <p:grpSpPr>
+        <a:xfrm>
+          <a:off x="0" y="0"/>
+          <a:ext cx="0" cy="0"/>
+          <a:chOff x="0" y="0"/>
+          <a:chExt cx="0" cy="0"/>
+        </a:xfrm>
+      </p:grpSpPr>
+      <p:pic>
+        <p:nvPicPr>
+          <p:cNvPr id="5" name="図 4">
+            <a:extLst>
+              <a:ext uri="{FF2B5EF4-FFF2-40B4-BE49-F238E27FC236}">
+                <a16:creationId xmlns:a16="http://schemas.microsoft.com/office/drawing/2014/main" id="{CDA80CA9-A466-1062-03B9-5E503DAEB239}"/>
+              </a:ext>
+            </a:extLst>
+          </p:cNvPr>
+          <p:cNvPicPr>
+            <a:picLocks noChangeAspect="1"/>
+          </p:cNvPicPr>
+          <p:nvPr/>
+        </p:nvPicPr>
+        <p:blipFill>
+          <a:blip r:embed="rId2">
+            <a:extLst>
+              <a:ext uri="{28A0092B-C50C-407E-A947-70E740481C1C}">
+                <a14:useLocalDpi xmlns:a14="http://schemas.microsoft.com/office/drawing/2010/main" val="0"/>
+              </a:ext>
+            </a:extLst>
+          </a:blip>
+          <a:stretch>
+            <a:fillRect/>
+          </a:stretch>
+        </p:blipFill>
+        <p:spPr>
+          <a:xfrm>
+            <a:off x="1593478" y="2028825"/>
+            <a:ext cx="4319878" cy="2981324"/>
+          </a:xfrm>
+          <a:prstGeom prst="rect">
+            <a:avLst/>
+          </a:prstGeom>
+        </p:spPr>
+      </p:pic>
+      <p:sp>
+        <p:nvSpPr>
+          <p:cNvPr id="6" name="正方形/長方形 5">
+            <a:extLst>
+              <a:ext uri="{FF2B5EF4-FFF2-40B4-BE49-F238E27FC236}">
+                <a16:creationId xmlns:a16="http://schemas.microsoft.com/office/drawing/2014/main" id="{09D2894D-AF64-A558-7788-9BB6F28E6481}"/>
+              </a:ext>
+            </a:extLst>
+          </p:cNvPr>
+          <p:cNvSpPr/>
+          <p:nvPr/>
+        </p:nvSpPr>
+        <p:spPr>
+          <a:xfrm flipV="1">
+            <a:off x="2417451" y="2795779"/>
+            <a:ext cx="3384000" cy="324000"/>
+          </a:xfrm>
+          <a:prstGeom prst="rect">
+            <a:avLst/>
+          </a:prstGeom>
+          <a:noFill/>
+          <a:ln w="28575">
+            <a:solidFill>
+              <a:srgbClr val="FF0000"/>
+            </a:solidFill>
+          </a:ln>
+        </p:spPr>
+        <p:style>
+          <a:lnRef idx="2">
+            <a:schemeClr val="accent6"/>
+          </a:lnRef>
+          <a:fillRef idx="1">
+            <a:schemeClr val="lt1"/>
+          </a:fillRef>
+          <a:effectRef idx="0">
+            <a:schemeClr val="accent6"/>
+          </a:effectRef>
+          <a:fontRef idx="minor">
+            <a:schemeClr val="dk1"/>
+          </a:fontRef>
+        </p:style>
+        <p:txBody>
+          <a:bodyPr rtlCol="0" anchor="ctr"/>
+          <a:lstStyle/>
+          <a:p>
+            <a:pPr algn="ctr"/>
+            <a:endParaRPr kumimoji="1" lang="ja-JP" altLang="en-US"/>
+          </a:p>
+        </p:txBody>
+      </p:sp>
+      <p:pic>
+        <p:nvPicPr>
+          <p:cNvPr id="8" name="図 7">
+            <a:extLst>
+              <a:ext uri="{FF2B5EF4-FFF2-40B4-BE49-F238E27FC236}">
+                <a16:creationId xmlns:a16="http://schemas.microsoft.com/office/drawing/2014/main" id="{601E205C-07D6-88CE-E8FC-DF60E3F8FDF5}"/>
+              </a:ext>
+            </a:extLst>
+          </p:cNvPr>
+          <p:cNvPicPr>
+            <a:picLocks noChangeAspect="1"/>
+          </p:cNvPicPr>
+          <p:nvPr/>
+        </p:nvPicPr>
+        <p:blipFill>
+          <a:blip r:embed="rId3">
+            <a:extLst>
+              <a:ext uri="{28A0092B-C50C-407E-A947-70E740481C1C}">
+                <a14:useLocalDpi xmlns:a14="http://schemas.microsoft.com/office/drawing/2010/main" val="0"/>
+              </a:ext>
+            </a:extLst>
+          </a:blip>
+          <a:stretch>
+            <a:fillRect/>
+          </a:stretch>
+        </p:blipFill>
+        <p:spPr>
+          <a:xfrm>
+            <a:off x="3660370" y="4615640"/>
+            <a:ext cx="1190625" cy="186806"/>
+          </a:xfrm>
+          <a:prstGeom prst="rect">
+            <a:avLst/>
+          </a:prstGeom>
+        </p:spPr>
+      </p:pic>
+    </p:spTree>
+    <p:extLst>
+      <p:ext uri="{BB962C8B-B14F-4D97-AF65-F5344CB8AC3E}">
+        <p14:creationId xmlns:p14="http://schemas.microsoft.com/office/powerpoint/2010/main" val="2306950672"/>
+      </p:ext>
+    </p:extLst>
+  </p:cSld>
+  <p:clrMapOvr>
+    <a:masterClrMapping/>
+  </p:clrMapOvr>
+</p:sld>
+</file>
+
+<file path=ppt/slides/slide31.xml><?xml version="1.0" encoding="utf-8"?>
+<p:sld xmlns:a="http://schemas.openxmlformats.org/drawingml/2006/main" xmlns:r="http://schemas.openxmlformats.org/officeDocument/2006/relationships" xmlns:p="http://schemas.openxmlformats.org/presentationml/2006/main">
+  <p:cSld>
+    <p:spTree>
+      <p:nvGrpSpPr>
+        <p:cNvPr id="1" name="">
+          <a:extLst>
+            <a:ext uri="{FF2B5EF4-FFF2-40B4-BE49-F238E27FC236}">
+              <a16:creationId xmlns:a16="http://schemas.microsoft.com/office/drawing/2014/main" id="{88E9F8E6-61D2-B149-597C-AC4FF9CE51B9}"/>
+            </a:ext>
+          </a:extLst>
+        </p:cNvPr>
+        <p:cNvGrpSpPr/>
+        <p:nvPr/>
+      </p:nvGrpSpPr>
+      <p:grpSpPr>
+        <a:xfrm>
+          <a:off x="0" y="0"/>
+          <a:ext cx="0" cy="0"/>
+          <a:chOff x="0" y="0"/>
+          <a:chExt cx="0" cy="0"/>
+        </a:xfrm>
+      </p:grpSpPr>
+      <p:pic>
+        <p:nvPicPr>
+          <p:cNvPr id="5" name="図 4">
+            <a:extLst>
+              <a:ext uri="{FF2B5EF4-FFF2-40B4-BE49-F238E27FC236}">
+                <a16:creationId xmlns:a16="http://schemas.microsoft.com/office/drawing/2014/main" id="{29D041BA-C2A1-E296-CC5A-D514970C282A}"/>
+              </a:ext>
+            </a:extLst>
+          </p:cNvPr>
+          <p:cNvPicPr>
+            <a:picLocks noChangeAspect="1"/>
+          </p:cNvPicPr>
+          <p:nvPr/>
+        </p:nvPicPr>
+        <p:blipFill>
+          <a:blip r:embed="rId2">
+            <a:extLst>
+              <a:ext uri="{28A0092B-C50C-407E-A947-70E740481C1C}">
+                <a14:useLocalDpi xmlns:a14="http://schemas.microsoft.com/office/drawing/2010/main" val="0"/>
+              </a:ext>
+            </a:extLst>
+          </a:blip>
+          <a:stretch>
+            <a:fillRect/>
+          </a:stretch>
+        </p:blipFill>
+        <p:spPr>
+          <a:xfrm>
+            <a:off x="1593478" y="2028825"/>
+            <a:ext cx="4319878" cy="2981324"/>
+          </a:xfrm>
+          <a:prstGeom prst="rect">
+            <a:avLst/>
+          </a:prstGeom>
+        </p:spPr>
+      </p:pic>
+      <p:sp>
+        <p:nvSpPr>
+          <p:cNvPr id="7" name="正方形/長方形 6">
+            <a:extLst>
+              <a:ext uri="{FF2B5EF4-FFF2-40B4-BE49-F238E27FC236}">
+                <a16:creationId xmlns:a16="http://schemas.microsoft.com/office/drawing/2014/main" id="{312568C3-12AE-CA67-818E-FBE627444834}"/>
+              </a:ext>
+            </a:extLst>
+          </p:cNvPr>
+          <p:cNvSpPr/>
+          <p:nvPr/>
+        </p:nvSpPr>
+        <p:spPr>
+          <a:xfrm flipV="1">
+            <a:off x="2417451" y="3256094"/>
+            <a:ext cx="3384000" cy="324000"/>
+          </a:xfrm>
+          <a:prstGeom prst="rect">
+            <a:avLst/>
+          </a:prstGeom>
+          <a:noFill/>
+          <a:ln w="28575">
+            <a:solidFill>
+              <a:srgbClr val="FF0000"/>
+            </a:solidFill>
+          </a:ln>
+        </p:spPr>
+        <p:style>
+          <a:lnRef idx="2">
+            <a:schemeClr val="accent6"/>
+          </a:lnRef>
+          <a:fillRef idx="1">
+            <a:schemeClr val="lt1"/>
+          </a:fillRef>
+          <a:effectRef idx="0">
+            <a:schemeClr val="accent6"/>
+          </a:effectRef>
+          <a:fontRef idx="minor">
+            <a:schemeClr val="dk1"/>
+          </a:fontRef>
+        </p:style>
+        <p:txBody>
+          <a:bodyPr rtlCol="0" anchor="ctr"/>
+          <a:lstStyle/>
+          <a:p>
+            <a:pPr algn="ctr"/>
+            <a:endParaRPr kumimoji="1" lang="ja-JP" altLang="en-US"/>
+          </a:p>
+        </p:txBody>
+      </p:sp>
+      <p:pic>
+        <p:nvPicPr>
+          <p:cNvPr id="8" name="図 7">
+            <a:extLst>
+              <a:ext uri="{FF2B5EF4-FFF2-40B4-BE49-F238E27FC236}">
+                <a16:creationId xmlns:a16="http://schemas.microsoft.com/office/drawing/2014/main" id="{BA37160A-479E-0DF6-698D-539A7C017E82}"/>
+              </a:ext>
+            </a:extLst>
+          </p:cNvPr>
+          <p:cNvPicPr>
+            <a:picLocks noChangeAspect="1"/>
+          </p:cNvPicPr>
+          <p:nvPr/>
+        </p:nvPicPr>
+        <p:blipFill>
+          <a:blip r:embed="rId3">
+            <a:extLst>
+              <a:ext uri="{28A0092B-C50C-407E-A947-70E740481C1C}">
+                <a14:useLocalDpi xmlns:a14="http://schemas.microsoft.com/office/drawing/2010/main" val="0"/>
+              </a:ext>
+            </a:extLst>
+          </a:blip>
+          <a:stretch>
+            <a:fillRect/>
+          </a:stretch>
+        </p:blipFill>
+        <p:spPr>
+          <a:xfrm>
+            <a:off x="3660370" y="4615640"/>
+            <a:ext cx="1190625" cy="186806"/>
+          </a:xfrm>
+          <a:prstGeom prst="rect">
+            <a:avLst/>
+          </a:prstGeom>
+        </p:spPr>
+      </p:pic>
+    </p:spTree>
+    <p:extLst>
+      <p:ext uri="{BB962C8B-B14F-4D97-AF65-F5344CB8AC3E}">
+        <p14:creationId xmlns:p14="http://schemas.microsoft.com/office/powerpoint/2010/main" val="2506004877"/>
+      </p:ext>
+    </p:extLst>
+  </p:cSld>
+  <p:clrMapOvr>
+    <a:masterClrMapping/>
+  </p:clrMapOvr>
+</p:sld>
+</file>
+
+<file path=ppt/slides/slide32.xml><?xml version="1.0" encoding="utf-8"?>
+<p:sld xmlns:a="http://schemas.openxmlformats.org/drawingml/2006/main" xmlns:r="http://schemas.openxmlformats.org/officeDocument/2006/relationships" xmlns:p="http://schemas.openxmlformats.org/presentationml/2006/main">
+  <p:cSld>
+    <p:spTree>
+      <p:nvGrpSpPr>
+        <p:cNvPr id="1" name="">
+          <a:extLst>
+            <a:ext uri="{FF2B5EF4-FFF2-40B4-BE49-F238E27FC236}">
+              <a16:creationId xmlns:a16="http://schemas.microsoft.com/office/drawing/2014/main" id="{E15C9A89-61B4-5F09-CCB2-C02D72F8BA7E}"/>
+            </a:ext>
+          </a:extLst>
+        </p:cNvPr>
+        <p:cNvGrpSpPr/>
+        <p:nvPr/>
+      </p:nvGrpSpPr>
+      <p:grpSpPr>
+        <a:xfrm>
+          <a:off x="0" y="0"/>
+          <a:ext cx="0" cy="0"/>
+          <a:chOff x="0" y="0"/>
+          <a:chExt cx="0" cy="0"/>
+        </a:xfrm>
+      </p:grpSpPr>
+      <p:grpSp>
+        <p:nvGrpSpPr>
+          <p:cNvPr id="11" name="グループ化 10">
+            <a:extLst>
+              <a:ext uri="{FF2B5EF4-FFF2-40B4-BE49-F238E27FC236}">
+                <a16:creationId xmlns:a16="http://schemas.microsoft.com/office/drawing/2014/main" id="{D0F4ABAE-84B7-F932-3F25-DC4F91616A9F}"/>
+              </a:ext>
+            </a:extLst>
+          </p:cNvPr>
+          <p:cNvGrpSpPr/>
+          <p:nvPr/>
+        </p:nvGrpSpPr>
+        <p:grpSpPr>
+          <a:xfrm>
+            <a:off x="2798858" y="1938337"/>
+            <a:ext cx="4076700" cy="2981325"/>
+            <a:chOff x="7137593" y="2028824"/>
+            <a:chExt cx="4076700" cy="2981325"/>
+          </a:xfrm>
+        </p:grpSpPr>
+        <p:pic>
+          <p:nvPicPr>
+            <p:cNvPr id="2" name="図 1">
+              <a:extLst>
+                <a:ext uri="{FF2B5EF4-FFF2-40B4-BE49-F238E27FC236}">
+                  <a16:creationId xmlns:a16="http://schemas.microsoft.com/office/drawing/2014/main" id="{4074A3FA-686B-4D1C-BA8D-CD4CFE74AB94}"/>
+                </a:ext>
+              </a:extLst>
+            </p:cNvPr>
+            <p:cNvPicPr>
+              <a:picLocks noChangeAspect="1"/>
+            </p:cNvPicPr>
+            <p:nvPr/>
+          </p:nvPicPr>
+          <p:blipFill>
+            <a:blip r:embed="rId2">
+              <a:extLst>
+                <a:ext uri="{28A0092B-C50C-407E-A947-70E740481C1C}">
+                  <a14:useLocalDpi xmlns:a14="http://schemas.microsoft.com/office/drawing/2010/main" val="0"/>
+                </a:ext>
+              </a:extLst>
+            </a:blip>
+            <a:stretch>
+              <a:fillRect/>
+            </a:stretch>
+          </p:blipFill>
+          <p:spPr>
+            <a:xfrm>
+              <a:off x="7137593" y="2028824"/>
+              <a:ext cx="4076700" cy="2981325"/>
+            </a:xfrm>
+            <a:prstGeom prst="rect">
+              <a:avLst/>
+            </a:prstGeom>
+          </p:spPr>
+        </p:pic>
+        <p:pic>
+          <p:nvPicPr>
+            <p:cNvPr id="9" name="図 8">
+              <a:extLst>
+                <a:ext uri="{FF2B5EF4-FFF2-40B4-BE49-F238E27FC236}">
+                  <a16:creationId xmlns:a16="http://schemas.microsoft.com/office/drawing/2014/main" id="{88F992E9-D081-9CF3-BE32-39306D90B571}"/>
+                </a:ext>
+              </a:extLst>
+            </p:cNvPr>
+            <p:cNvPicPr>
+              <a:picLocks noChangeAspect="1"/>
+            </p:cNvPicPr>
+            <p:nvPr/>
+          </p:nvPicPr>
+          <p:blipFill>
+            <a:blip r:embed="rId3">
+              <a:extLst>
+                <a:ext uri="{28A0092B-C50C-407E-A947-70E740481C1C}">
+                  <a14:useLocalDpi xmlns:a14="http://schemas.microsoft.com/office/drawing/2010/main" val="0"/>
+                </a:ext>
+              </a:extLst>
+            </a:blip>
+            <a:stretch>
+              <a:fillRect/>
+            </a:stretch>
+          </p:blipFill>
+          <p:spPr>
+            <a:xfrm>
+              <a:off x="8869039" y="4441273"/>
+              <a:ext cx="1190625" cy="186806"/>
+            </a:xfrm>
+            <a:prstGeom prst="rect">
+              <a:avLst/>
+            </a:prstGeom>
+          </p:spPr>
+        </p:pic>
+        <p:pic>
+          <p:nvPicPr>
+            <p:cNvPr id="10" name="図 9">
+              <a:extLst>
+                <a:ext uri="{FF2B5EF4-FFF2-40B4-BE49-F238E27FC236}">
+                  <a16:creationId xmlns:a16="http://schemas.microsoft.com/office/drawing/2014/main" id="{35B8B543-493A-D352-789A-0936BABA61E4}"/>
+                </a:ext>
+              </a:extLst>
+            </p:cNvPr>
+            <p:cNvPicPr>
+              <a:picLocks noChangeAspect="1"/>
+            </p:cNvPicPr>
+            <p:nvPr/>
+          </p:nvPicPr>
+          <p:blipFill>
+            <a:blip r:embed="rId3">
+              <a:extLst>
+                <a:ext uri="{28A0092B-C50C-407E-A947-70E740481C1C}">
+                  <a14:useLocalDpi xmlns:a14="http://schemas.microsoft.com/office/drawing/2010/main" val="0"/>
+                </a:ext>
+              </a:extLst>
+            </a:blip>
+            <a:stretch>
+              <a:fillRect/>
+            </a:stretch>
+          </p:blipFill>
+          <p:spPr>
+            <a:xfrm>
+              <a:off x="9008997" y="4693296"/>
+              <a:ext cx="1190625" cy="186806"/>
+            </a:xfrm>
+            <a:prstGeom prst="rect">
+              <a:avLst/>
+            </a:prstGeom>
+          </p:spPr>
+        </p:pic>
+      </p:grpSp>
+      <p:sp>
+        <p:nvSpPr>
+          <p:cNvPr id="4" name="正方形/長方形 3">
+            <a:extLst>
+              <a:ext uri="{FF2B5EF4-FFF2-40B4-BE49-F238E27FC236}">
+                <a16:creationId xmlns:a16="http://schemas.microsoft.com/office/drawing/2014/main" id="{A5671088-4D01-CD46-3C10-8DBB316C5DC9}"/>
+              </a:ext>
+            </a:extLst>
+          </p:cNvPr>
+          <p:cNvSpPr/>
+          <p:nvPr/>
+        </p:nvSpPr>
+        <p:spPr>
+          <a:xfrm flipV="1">
+            <a:off x="3215951" y="4285569"/>
+            <a:ext cx="3659607" cy="317241"/>
+          </a:xfrm>
+          <a:prstGeom prst="rect">
+            <a:avLst/>
+          </a:prstGeom>
+          <a:noFill/>
+          <a:ln w="28575">
+            <a:solidFill>
+              <a:srgbClr val="FF0000"/>
+            </a:solidFill>
+          </a:ln>
+        </p:spPr>
+        <p:style>
+          <a:lnRef idx="2">
+            <a:schemeClr val="accent6"/>
+          </a:lnRef>
+          <a:fillRef idx="1">
+            <a:schemeClr val="lt1"/>
+          </a:fillRef>
+          <a:effectRef idx="0">
+            <a:schemeClr val="accent6"/>
+          </a:effectRef>
+          <a:fontRef idx="minor">
+            <a:schemeClr val="dk1"/>
+          </a:fontRef>
+        </p:style>
+        <p:txBody>
+          <a:bodyPr rtlCol="0" anchor="ctr"/>
+          <a:lstStyle/>
+          <a:p>
+            <a:pPr algn="ctr"/>
+            <a:endParaRPr kumimoji="1" lang="ja-JP" altLang="en-US"/>
+          </a:p>
+        </p:txBody>
+      </p:sp>
+    </p:spTree>
+    <p:extLst>
+      <p:ext uri="{BB962C8B-B14F-4D97-AF65-F5344CB8AC3E}">
+        <p14:creationId xmlns:p14="http://schemas.microsoft.com/office/powerpoint/2010/main" val="2692638627"/>
+      </p:ext>
+    </p:extLst>
+  </p:cSld>
+  <p:clrMapOvr>
+    <a:masterClrMapping/>
+  </p:clrMapOvr>
+</p:sld>
+</file>
+
+<file path=ppt/slides/slide33.xml><?xml version="1.0" encoding="utf-8"?>
+<p:sld xmlns:a="http://schemas.openxmlformats.org/drawingml/2006/main" xmlns:r="http://schemas.openxmlformats.org/officeDocument/2006/relationships" xmlns:p="http://schemas.openxmlformats.org/presentationml/2006/main">
+  <p:cSld>
+    <p:spTree>
+      <p:nvGrpSpPr>
+        <p:cNvPr id="1" name="">
+          <a:extLst>
+            <a:ext uri="{FF2B5EF4-FFF2-40B4-BE49-F238E27FC236}">
+              <a16:creationId xmlns:a16="http://schemas.microsoft.com/office/drawing/2014/main" id="{7A2E2B16-D3E5-F371-F2C0-1D75A1E8C5E5}"/>
+            </a:ext>
+          </a:extLst>
+        </p:cNvPr>
+        <p:cNvGrpSpPr/>
+        <p:nvPr/>
+      </p:nvGrpSpPr>
+      <p:grpSpPr>
+        <a:xfrm>
+          <a:off x="0" y="0"/>
+          <a:ext cx="0" cy="0"/>
+          <a:chOff x="0" y="0"/>
+          <a:chExt cx="0" cy="0"/>
+        </a:xfrm>
+      </p:grpSpPr>
+    </p:spTree>
+    <p:extLst>
+      <p:ext uri="{BB962C8B-B14F-4D97-AF65-F5344CB8AC3E}">
+        <p14:creationId xmlns:p14="http://schemas.microsoft.com/office/powerpoint/2010/main" val="3395482793"/>
+      </p:ext>
+    </p:extLst>
+  </p:cSld>
+  <p:clrMapOvr>
+    <a:masterClrMapping/>
+  </p:clrMapOvr>
+</p:sld>
+</file>
+
+<file path=ppt/slides/slide34.xml><?xml version="1.0" encoding="utf-8"?>
+<p:sld xmlns:a="http://schemas.openxmlformats.org/drawingml/2006/main" xmlns:r="http://schemas.openxmlformats.org/officeDocument/2006/relationships" xmlns:p="http://schemas.openxmlformats.org/presentationml/2006/main">
+  <p:cSld>
+    <p:spTree>
+      <p:nvGrpSpPr>
+        <p:cNvPr id="1" name="">
+          <a:extLst>
+            <a:ext uri="{FF2B5EF4-FFF2-40B4-BE49-F238E27FC236}">
+              <a16:creationId xmlns:a16="http://schemas.microsoft.com/office/drawing/2014/main" id="{F515784C-4BA1-A9D9-8D38-2AE1CB5E33BD}"/>
+            </a:ext>
+          </a:extLst>
+        </p:cNvPr>
+        <p:cNvGrpSpPr/>
+        <p:nvPr/>
+      </p:nvGrpSpPr>
+      <p:grpSpPr>
+        <a:xfrm>
+          <a:off x="0" y="0"/>
+          <a:ext cx="0" cy="0"/>
+          <a:chOff x="0" y="0"/>
+          <a:chExt cx="0" cy="0"/>
+        </a:xfrm>
+      </p:grpSpPr>
+      <p:grpSp>
+        <p:nvGrpSpPr>
+          <p:cNvPr id="7" name="グループ化 6">
+            <a:extLst>
+              <a:ext uri="{FF2B5EF4-FFF2-40B4-BE49-F238E27FC236}">
+                <a16:creationId xmlns:a16="http://schemas.microsoft.com/office/drawing/2014/main" id="{8D872330-24A4-9398-2ABF-F9035751AE13}"/>
+              </a:ext>
+            </a:extLst>
+          </p:cNvPr>
+          <p:cNvGrpSpPr/>
+          <p:nvPr/>
+        </p:nvGrpSpPr>
+        <p:grpSpPr>
+          <a:xfrm>
+            <a:off x="4086225" y="579761"/>
+            <a:ext cx="4019550" cy="5362575"/>
+            <a:chOff x="4086225" y="579761"/>
+            <a:chExt cx="4019550" cy="5362575"/>
+          </a:xfrm>
+        </p:grpSpPr>
+        <p:pic>
+          <p:nvPicPr>
+            <p:cNvPr id="3" name="図 2">
+              <a:extLst>
+                <a:ext uri="{FF2B5EF4-FFF2-40B4-BE49-F238E27FC236}">
+                  <a16:creationId xmlns:a16="http://schemas.microsoft.com/office/drawing/2014/main" id="{E83640F9-D2A0-F368-0A35-DDDE878F8C9F}"/>
+                </a:ext>
+              </a:extLst>
+            </p:cNvPr>
+            <p:cNvPicPr>
+              <a:picLocks noChangeAspect="1"/>
+            </p:cNvPicPr>
+            <p:nvPr/>
+          </p:nvPicPr>
+          <p:blipFill>
+            <a:blip r:embed="rId2">
+              <a:extLst>
+                <a:ext uri="{28A0092B-C50C-407E-A947-70E740481C1C}">
+                  <a14:useLocalDpi xmlns:a14="http://schemas.microsoft.com/office/drawing/2010/main" val="0"/>
+                </a:ext>
+              </a:extLst>
+            </a:blip>
+            <a:stretch>
+              <a:fillRect/>
+            </a:stretch>
+          </p:blipFill>
+          <p:spPr>
+            <a:xfrm>
+              <a:off x="4086225" y="579761"/>
+              <a:ext cx="4019550" cy="5362575"/>
+            </a:xfrm>
+            <a:prstGeom prst="rect">
+              <a:avLst/>
+            </a:prstGeom>
+          </p:spPr>
+        </p:pic>
+        <p:pic>
+          <p:nvPicPr>
+            <p:cNvPr id="5" name="図 4">
+              <a:extLst>
+                <a:ext uri="{FF2B5EF4-FFF2-40B4-BE49-F238E27FC236}">
+                  <a16:creationId xmlns:a16="http://schemas.microsoft.com/office/drawing/2014/main" id="{5E43F52B-FA3C-529C-7489-16C49B3EB203}"/>
+                </a:ext>
+              </a:extLst>
+            </p:cNvPr>
+            <p:cNvPicPr>
+              <a:picLocks noChangeAspect="1"/>
+            </p:cNvPicPr>
+            <p:nvPr/>
+          </p:nvPicPr>
+          <p:blipFill>
+            <a:blip r:embed="rId3">
+              <a:extLst>
+                <a:ext uri="{28A0092B-C50C-407E-A947-70E740481C1C}">
+                  <a14:useLocalDpi xmlns:a14="http://schemas.microsoft.com/office/drawing/2010/main" val="0"/>
+                </a:ext>
+              </a:extLst>
+            </a:blip>
+            <a:stretch>
+              <a:fillRect/>
+            </a:stretch>
+          </p:blipFill>
+          <p:spPr>
+            <a:xfrm>
+              <a:off x="5853064" y="3335597"/>
+              <a:ext cx="1190625" cy="186806"/>
+            </a:xfrm>
+            <a:prstGeom prst="rect">
+              <a:avLst/>
+            </a:prstGeom>
+          </p:spPr>
+        </p:pic>
+        <p:pic>
+          <p:nvPicPr>
+            <p:cNvPr id="6" name="図 5">
+              <a:extLst>
+                <a:ext uri="{FF2B5EF4-FFF2-40B4-BE49-F238E27FC236}">
+                  <a16:creationId xmlns:a16="http://schemas.microsoft.com/office/drawing/2014/main" id="{ADDBF4C8-6701-680A-F9B0-5C8721279A8C}"/>
+                </a:ext>
+              </a:extLst>
+            </p:cNvPr>
+            <p:cNvPicPr>
+              <a:picLocks noChangeAspect="1"/>
+            </p:cNvPicPr>
+            <p:nvPr/>
+          </p:nvPicPr>
+          <p:blipFill>
+            <a:blip r:embed="rId3">
+              <a:extLst>
+                <a:ext uri="{28A0092B-C50C-407E-A947-70E740481C1C}">
+                  <a14:useLocalDpi xmlns:a14="http://schemas.microsoft.com/office/drawing/2010/main" val="0"/>
+                </a:ext>
+              </a:extLst>
+            </a:blip>
+            <a:stretch>
+              <a:fillRect/>
+            </a:stretch>
+          </p:blipFill>
+          <p:spPr>
+            <a:xfrm>
+              <a:off x="5990250" y="3626595"/>
+              <a:ext cx="1190625" cy="186806"/>
+            </a:xfrm>
+            <a:prstGeom prst="rect">
+              <a:avLst/>
+            </a:prstGeom>
+          </p:spPr>
+        </p:pic>
+      </p:grpSp>
+      <p:sp>
+        <p:nvSpPr>
+          <p:cNvPr id="4" name="正方形/長方形 3">
+            <a:extLst>
+              <a:ext uri="{FF2B5EF4-FFF2-40B4-BE49-F238E27FC236}">
+                <a16:creationId xmlns:a16="http://schemas.microsoft.com/office/drawing/2014/main" id="{1D895AFD-77D7-71FE-BD5C-70B62F7318FF}"/>
+              </a:ext>
+            </a:extLst>
+          </p:cNvPr>
+          <p:cNvSpPr/>
+          <p:nvPr/>
+        </p:nvSpPr>
+        <p:spPr>
+          <a:xfrm flipV="1">
+            <a:off x="4494244" y="5709069"/>
+            <a:ext cx="824205" cy="216000"/>
+          </a:xfrm>
+          <a:prstGeom prst="rect">
+            <a:avLst/>
+          </a:prstGeom>
+          <a:noFill/>
+          <a:ln w="28575">
+            <a:solidFill>
+              <a:srgbClr val="FF0000"/>
+            </a:solidFill>
+          </a:ln>
+        </p:spPr>
+        <p:style>
+          <a:lnRef idx="2">
+            <a:schemeClr val="accent6"/>
+          </a:lnRef>
+          <a:fillRef idx="1">
+            <a:schemeClr val="lt1"/>
+          </a:fillRef>
+          <a:effectRef idx="0">
+            <a:schemeClr val="accent6"/>
+          </a:effectRef>
+          <a:fontRef idx="minor">
+            <a:schemeClr val="dk1"/>
+          </a:fontRef>
+        </p:style>
+        <p:txBody>
+          <a:bodyPr rtlCol="0" anchor="ctr"/>
+          <a:lstStyle/>
+          <a:p>
+            <a:pPr algn="ctr"/>
+            <a:endParaRPr kumimoji="1" lang="ja-JP" altLang="en-US"/>
+          </a:p>
+        </p:txBody>
+      </p:sp>
+    </p:spTree>
+    <p:extLst>
+      <p:ext uri="{BB962C8B-B14F-4D97-AF65-F5344CB8AC3E}">
+        <p14:creationId xmlns:p14="http://schemas.microsoft.com/office/powerpoint/2010/main" val="3214667272"/>
+      </p:ext>
+    </p:extLst>
+  </p:cSld>
+  <p:clrMapOvr>
+    <a:masterClrMapping/>
+  </p:clrMapOvr>
+</p:sld>
+</file>
+
+<file path=ppt/slides/slide35.xml><?xml version="1.0" encoding="utf-8"?>
+<p:sld xmlns:a="http://schemas.openxmlformats.org/drawingml/2006/main" xmlns:r="http://schemas.openxmlformats.org/officeDocument/2006/relationships" xmlns:p="http://schemas.openxmlformats.org/presentationml/2006/main">
+  <p:cSld>
+    <p:spTree>
+      <p:nvGrpSpPr>
+        <p:cNvPr id="1" name="">
+          <a:extLst>
+            <a:ext uri="{FF2B5EF4-FFF2-40B4-BE49-F238E27FC236}">
+              <a16:creationId xmlns:a16="http://schemas.microsoft.com/office/drawing/2014/main" id="{151B3545-80FB-2ED7-E3AE-72A78CD72B69}"/>
+            </a:ext>
+          </a:extLst>
+        </p:cNvPr>
+        <p:cNvGrpSpPr/>
+        <p:nvPr/>
+      </p:nvGrpSpPr>
+      <p:grpSpPr>
+        <a:xfrm>
+          <a:off x="0" y="0"/>
+          <a:ext cx="0" cy="0"/>
+          <a:chOff x="0" y="0"/>
+          <a:chExt cx="0" cy="0"/>
+        </a:xfrm>
+      </p:grpSpPr>
+      <p:pic>
+        <p:nvPicPr>
+          <p:cNvPr id="3" name="図 2">
+            <a:extLst>
+              <a:ext uri="{FF2B5EF4-FFF2-40B4-BE49-F238E27FC236}">
+                <a16:creationId xmlns:a16="http://schemas.microsoft.com/office/drawing/2014/main" id="{1EE16D31-4479-43AB-1C6A-338064A3198B}"/>
+              </a:ext>
+            </a:extLst>
+          </p:cNvPr>
+          <p:cNvPicPr>
+            <a:picLocks noChangeAspect="1"/>
+          </p:cNvPicPr>
+          <p:nvPr/>
+        </p:nvPicPr>
+        <p:blipFill>
+          <a:blip r:embed="rId2">
+            <a:extLst>
+              <a:ext uri="{28A0092B-C50C-407E-A947-70E740481C1C}">
+                <a14:useLocalDpi xmlns:a14="http://schemas.microsoft.com/office/drawing/2010/main" val="0"/>
+              </a:ext>
+            </a:extLst>
+          </a:blip>
+          <a:stretch>
+            <a:fillRect/>
+          </a:stretch>
+        </p:blipFill>
+        <p:spPr>
+          <a:xfrm>
+            <a:off x="742950" y="2352675"/>
+            <a:ext cx="10706100" cy="2152650"/>
+          </a:xfrm>
+          <a:prstGeom prst="rect">
+            <a:avLst/>
+          </a:prstGeom>
+        </p:spPr>
+      </p:pic>
+      <p:pic>
+        <p:nvPicPr>
+          <p:cNvPr id="4" name="図 3">
+            <a:extLst>
+              <a:ext uri="{FF2B5EF4-FFF2-40B4-BE49-F238E27FC236}">
+                <a16:creationId xmlns:a16="http://schemas.microsoft.com/office/drawing/2014/main" id="{4165BAC3-187A-29B5-46DE-037C7A12917D}"/>
+              </a:ext>
+            </a:extLst>
+          </p:cNvPr>
+          <p:cNvPicPr>
+            <a:picLocks noChangeAspect="1"/>
+          </p:cNvPicPr>
+          <p:nvPr/>
+        </p:nvPicPr>
+        <p:blipFill>
+          <a:blip r:embed="rId3">
+            <a:extLst>
+              <a:ext uri="{28A0092B-C50C-407E-A947-70E740481C1C}">
+                <a14:useLocalDpi xmlns:a14="http://schemas.microsoft.com/office/drawing/2010/main" val="0"/>
+              </a:ext>
+            </a:extLst>
+          </a:blip>
+          <a:stretch>
+            <a:fillRect/>
+          </a:stretch>
+        </p:blipFill>
+        <p:spPr>
+          <a:xfrm>
+            <a:off x="4472304" y="3953166"/>
+            <a:ext cx="851779" cy="133642"/>
+          </a:xfrm>
+          <a:prstGeom prst="rect">
+            <a:avLst/>
+          </a:prstGeom>
+        </p:spPr>
+      </p:pic>
+      <p:sp>
+        <p:nvSpPr>
+          <p:cNvPr id="5" name="正方形/長方形 4">
+            <a:extLst>
+              <a:ext uri="{FF2B5EF4-FFF2-40B4-BE49-F238E27FC236}">
+                <a16:creationId xmlns:a16="http://schemas.microsoft.com/office/drawing/2014/main" id="{23231995-ADA4-D2D9-6205-62633384E8E2}"/>
+              </a:ext>
+            </a:extLst>
+          </p:cNvPr>
+          <p:cNvSpPr/>
+          <p:nvPr/>
+        </p:nvSpPr>
+        <p:spPr>
+          <a:xfrm flipV="1">
+            <a:off x="4453642" y="4180112"/>
+            <a:ext cx="6668448" cy="233268"/>
+          </a:xfrm>
+          <a:prstGeom prst="rect">
+            <a:avLst/>
+          </a:prstGeom>
+          <a:noFill/>
+          <a:ln w="28575">
+            <a:solidFill>
+              <a:srgbClr val="FF0000"/>
+            </a:solidFill>
+          </a:ln>
+        </p:spPr>
+        <p:style>
+          <a:lnRef idx="2">
+            <a:schemeClr val="accent6"/>
+          </a:lnRef>
+          <a:fillRef idx="1">
+            <a:schemeClr val="lt1"/>
+          </a:fillRef>
+          <a:effectRef idx="0">
+            <a:schemeClr val="accent6"/>
+          </a:effectRef>
+          <a:fontRef idx="minor">
+            <a:schemeClr val="dk1"/>
+          </a:fontRef>
+        </p:style>
+        <p:txBody>
+          <a:bodyPr rtlCol="0" anchor="ctr"/>
+          <a:lstStyle/>
+          <a:p>
+            <a:pPr algn="ctr"/>
+            <a:endParaRPr kumimoji="1" lang="ja-JP" altLang="en-US"/>
+          </a:p>
+        </p:txBody>
+      </p:sp>
+    </p:spTree>
+    <p:extLst>
+      <p:ext uri="{BB962C8B-B14F-4D97-AF65-F5344CB8AC3E}">
+        <p14:creationId xmlns:p14="http://schemas.microsoft.com/office/powerpoint/2010/main" val="1855434181"/>
+      </p:ext>
+    </p:extLst>
+  </p:cSld>
+  <p:clrMapOvr>
+    <a:masterClrMapping/>
+  </p:clrMapOvr>
+</p:sld>
+</file>
+
+<file path=ppt/slides/slide36.xml><?xml version="1.0" encoding="utf-8"?>
+<p:sld xmlns:a="http://schemas.openxmlformats.org/drawingml/2006/main" xmlns:r="http://schemas.openxmlformats.org/officeDocument/2006/relationships" xmlns:p="http://schemas.openxmlformats.org/presentationml/2006/main">
+  <p:cSld>
+    <p:spTree>
+      <p:nvGrpSpPr>
+        <p:cNvPr id="1" name="">
+          <a:extLst>
+            <a:ext uri="{FF2B5EF4-FFF2-40B4-BE49-F238E27FC236}">
+              <a16:creationId xmlns:a16="http://schemas.microsoft.com/office/drawing/2014/main" id="{DDAF80E7-745A-CAE9-E6BB-1ED2858C3BC1}"/>
+            </a:ext>
+          </a:extLst>
+        </p:cNvPr>
+        <p:cNvGrpSpPr/>
+        <p:nvPr/>
+      </p:nvGrpSpPr>
+      <p:grpSpPr>
+        <a:xfrm>
+          <a:off x="0" y="0"/>
+          <a:ext cx="0" cy="0"/>
+          <a:chOff x="0" y="0"/>
+          <a:chExt cx="0" cy="0"/>
+        </a:xfrm>
+      </p:grpSpPr>
+      <p:pic>
+        <p:nvPicPr>
+          <p:cNvPr id="9" name="図 8">
+            <a:extLst>
+              <a:ext uri="{FF2B5EF4-FFF2-40B4-BE49-F238E27FC236}">
+                <a16:creationId xmlns:a16="http://schemas.microsoft.com/office/drawing/2014/main" id="{89DC54ED-E454-88A9-B234-2C2C320F071C}"/>
+              </a:ext>
+            </a:extLst>
+          </p:cNvPr>
+          <p:cNvPicPr>
+            <a:picLocks noChangeAspect="1"/>
+          </p:cNvPicPr>
+          <p:nvPr/>
+        </p:nvPicPr>
+        <p:blipFill>
+          <a:blip r:embed="rId2">
+            <a:extLst>
+              <a:ext uri="{28A0092B-C50C-407E-A947-70E740481C1C}">
+                <a14:useLocalDpi xmlns:a14="http://schemas.microsoft.com/office/drawing/2010/main" val="0"/>
+              </a:ext>
+            </a:extLst>
+          </a:blip>
+          <a:stretch>
+            <a:fillRect/>
+          </a:stretch>
+        </p:blipFill>
+        <p:spPr>
+          <a:xfrm>
+            <a:off x="4086225" y="738187"/>
+            <a:ext cx="4019550" cy="5381625"/>
+          </a:xfrm>
+          <a:prstGeom prst="rect">
+            <a:avLst/>
+          </a:prstGeom>
+        </p:spPr>
+      </p:pic>
+      <p:sp>
+        <p:nvSpPr>
+          <p:cNvPr id="4" name="正方形/長方形 3">
+            <a:extLst>
+              <a:ext uri="{FF2B5EF4-FFF2-40B4-BE49-F238E27FC236}">
+                <a16:creationId xmlns:a16="http://schemas.microsoft.com/office/drawing/2014/main" id="{DD6EAEE7-DF51-4415-067D-8D1EF78C883B}"/>
+              </a:ext>
+            </a:extLst>
+          </p:cNvPr>
+          <p:cNvSpPr/>
+          <p:nvPr/>
+        </p:nvSpPr>
+        <p:spPr>
+          <a:xfrm flipV="1">
+            <a:off x="4553751" y="3480313"/>
+            <a:ext cx="3542693" cy="252000"/>
+          </a:xfrm>
+          <a:prstGeom prst="rect">
+            <a:avLst/>
+          </a:prstGeom>
+          <a:noFill/>
+          <a:ln w="28575">
+            <a:solidFill>
+              <a:srgbClr val="FF0000"/>
+            </a:solidFill>
+          </a:ln>
+        </p:spPr>
+        <p:style>
+          <a:lnRef idx="2">
+            <a:schemeClr val="accent6"/>
+          </a:lnRef>
+          <a:fillRef idx="1">
+            <a:schemeClr val="lt1"/>
+          </a:fillRef>
+          <a:effectRef idx="0">
+            <a:schemeClr val="accent6"/>
+          </a:effectRef>
+          <a:fontRef idx="minor">
+            <a:schemeClr val="dk1"/>
+          </a:fontRef>
+        </p:style>
+        <p:txBody>
+          <a:bodyPr rtlCol="0" anchor="ctr"/>
+          <a:lstStyle/>
+          <a:p>
+            <a:pPr algn="ctr"/>
+            <a:endParaRPr kumimoji="1" lang="ja-JP" altLang="en-US"/>
+          </a:p>
+        </p:txBody>
+      </p:sp>
+      <p:pic>
+        <p:nvPicPr>
+          <p:cNvPr id="5" name="図 4">
+            <a:extLst>
+              <a:ext uri="{FF2B5EF4-FFF2-40B4-BE49-F238E27FC236}">
+                <a16:creationId xmlns:a16="http://schemas.microsoft.com/office/drawing/2014/main" id="{26E751F7-BC9B-8740-9301-0CD09DE1E4B4}"/>
+              </a:ext>
+            </a:extLst>
+          </p:cNvPr>
+          <p:cNvPicPr>
+            <a:picLocks noChangeAspect="1"/>
+          </p:cNvPicPr>
+          <p:nvPr/>
+        </p:nvPicPr>
+        <p:blipFill>
+          <a:blip r:embed="rId3">
+            <a:extLst>
+              <a:ext uri="{28A0092B-C50C-407E-A947-70E740481C1C}">
+                <a14:useLocalDpi xmlns:a14="http://schemas.microsoft.com/office/drawing/2010/main" val="0"/>
+              </a:ext>
+            </a:extLst>
+          </a:blip>
+          <a:stretch>
+            <a:fillRect/>
+          </a:stretch>
+        </p:blipFill>
+        <p:spPr>
+          <a:xfrm>
+            <a:off x="5990667" y="3528620"/>
+            <a:ext cx="851779" cy="184964"/>
+          </a:xfrm>
+          <a:prstGeom prst="rect">
+            <a:avLst/>
+          </a:prstGeom>
+        </p:spPr>
+      </p:pic>
+      <p:sp>
+        <p:nvSpPr>
+          <p:cNvPr id="10" name="正方形/長方形 9">
+            <a:extLst>
+              <a:ext uri="{FF2B5EF4-FFF2-40B4-BE49-F238E27FC236}">
+                <a16:creationId xmlns:a16="http://schemas.microsoft.com/office/drawing/2014/main" id="{D090C28F-BF39-3A18-FEAD-16496EA8CC79}"/>
+              </a:ext>
+            </a:extLst>
+          </p:cNvPr>
+          <p:cNvSpPr/>
+          <p:nvPr/>
+        </p:nvSpPr>
+        <p:spPr>
+          <a:xfrm flipV="1">
+            <a:off x="4494244" y="5886352"/>
+            <a:ext cx="612000" cy="216000"/>
+          </a:xfrm>
+          <a:prstGeom prst="rect">
+            <a:avLst/>
+          </a:prstGeom>
+          <a:noFill/>
+          <a:ln w="28575">
+            <a:solidFill>
+              <a:srgbClr val="FF0000"/>
+            </a:solidFill>
+          </a:ln>
+        </p:spPr>
+        <p:style>
+          <a:lnRef idx="2">
+            <a:schemeClr val="accent6"/>
+          </a:lnRef>
+          <a:fillRef idx="1">
+            <a:schemeClr val="lt1"/>
+          </a:fillRef>
+          <a:effectRef idx="0">
+            <a:schemeClr val="accent6"/>
+          </a:effectRef>
+          <a:fontRef idx="minor">
+            <a:schemeClr val="dk1"/>
+          </a:fontRef>
+        </p:style>
+        <p:txBody>
+          <a:bodyPr rtlCol="0" anchor="ctr"/>
+          <a:lstStyle/>
+          <a:p>
+            <a:pPr algn="ctr"/>
+            <a:endParaRPr kumimoji="1" lang="ja-JP" altLang="en-US"/>
+          </a:p>
+        </p:txBody>
+      </p:sp>
+    </p:spTree>
+    <p:extLst>
+      <p:ext uri="{BB962C8B-B14F-4D97-AF65-F5344CB8AC3E}">
+        <p14:creationId xmlns:p14="http://schemas.microsoft.com/office/powerpoint/2010/main" val="2987645749"/>
+      </p:ext>
+    </p:extLst>
+  </p:cSld>
+  <p:clrMapOvr>
+    <a:masterClrMapping/>
+  </p:clrMapOvr>
+</p:sld>
+</file>
+
+<file path=ppt/slides/slide37.xml><?xml version="1.0" encoding="utf-8"?>
+<p:sld xmlns:a="http://schemas.openxmlformats.org/drawingml/2006/main" xmlns:r="http://schemas.openxmlformats.org/officeDocument/2006/relationships" xmlns:p="http://schemas.openxmlformats.org/presentationml/2006/main">
+  <p:cSld>
+    <p:spTree>
+      <p:nvGrpSpPr>
+        <p:cNvPr id="1" name="">
+          <a:extLst>
+            <a:ext uri="{FF2B5EF4-FFF2-40B4-BE49-F238E27FC236}">
+              <a16:creationId xmlns:a16="http://schemas.microsoft.com/office/drawing/2014/main" id="{0D5FB31F-2F9F-46A6-6D03-51ED21366AD6}"/>
+            </a:ext>
+          </a:extLst>
+        </p:cNvPr>
+        <p:cNvGrpSpPr/>
+        <p:nvPr/>
+      </p:nvGrpSpPr>
+      <p:grpSpPr>
+        <a:xfrm>
+          <a:off x="0" y="0"/>
+          <a:ext cx="0" cy="0"/>
+          <a:chOff x="0" y="0"/>
+          <a:chExt cx="0" cy="0"/>
+        </a:xfrm>
+      </p:grpSpPr>
+    </p:spTree>
+    <p:extLst>
+      <p:ext uri="{BB962C8B-B14F-4D97-AF65-F5344CB8AC3E}">
+        <p14:creationId xmlns:p14="http://schemas.microsoft.com/office/powerpoint/2010/main" val="927544969"/>
+      </p:ext>
+    </p:extLst>
+  </p:cSld>
+  <p:clrMapOvr>
+    <a:masterClrMapping/>
+  </p:clrMapOvr>
+</p:sld>
+</file>
+
+<file path=ppt/slides/slide38.xml><?xml version="1.0" encoding="utf-8"?>
+<p:sld xmlns:a="http://schemas.openxmlformats.org/drawingml/2006/main" xmlns:r="http://schemas.openxmlformats.org/officeDocument/2006/relationships" xmlns:p="http://schemas.openxmlformats.org/presentationml/2006/main">
+  <p:cSld>
+    <p:spTree>
+      <p:nvGrpSpPr>
+        <p:cNvPr id="1" name="">
+          <a:extLst>
+            <a:ext uri="{FF2B5EF4-FFF2-40B4-BE49-F238E27FC236}">
+              <a16:creationId xmlns:a16="http://schemas.microsoft.com/office/drawing/2014/main" id="{55AA5C1A-A210-B80D-E6D9-D060606CAF6C}"/>
+            </a:ext>
+          </a:extLst>
+        </p:cNvPr>
+        <p:cNvGrpSpPr/>
+        <p:nvPr/>
+      </p:nvGrpSpPr>
+      <p:grpSpPr>
+        <a:xfrm>
+          <a:off x="0" y="0"/>
+          <a:ext cx="0" cy="0"/>
+          <a:chOff x="0" y="0"/>
+          <a:chExt cx="0" cy="0"/>
+        </a:xfrm>
+      </p:grpSpPr>
+      <p:pic>
+        <p:nvPicPr>
+          <p:cNvPr id="3" name="図 2">
+            <a:extLst>
+              <a:ext uri="{FF2B5EF4-FFF2-40B4-BE49-F238E27FC236}">
+                <a16:creationId xmlns:a16="http://schemas.microsoft.com/office/drawing/2014/main" id="{5446301D-E638-5CC8-870B-58C3F5F6AD1C}"/>
+              </a:ext>
+            </a:extLst>
+          </p:cNvPr>
+          <p:cNvPicPr>
+            <a:picLocks noChangeAspect="1"/>
+          </p:cNvPicPr>
+          <p:nvPr/>
+        </p:nvPicPr>
+        <p:blipFill>
+          <a:blip r:embed="rId2">
+            <a:extLst>
+              <a:ext uri="{28A0092B-C50C-407E-A947-70E740481C1C}">
+                <a14:useLocalDpi xmlns:a14="http://schemas.microsoft.com/office/drawing/2010/main" val="0"/>
+              </a:ext>
+            </a:extLst>
+          </a:blip>
+          <a:stretch>
+            <a:fillRect/>
+          </a:stretch>
+        </p:blipFill>
+        <p:spPr>
+          <a:xfrm>
+            <a:off x="1890712" y="1562100"/>
+            <a:ext cx="8410575" cy="3733800"/>
+          </a:xfrm>
+          <a:prstGeom prst="rect">
+            <a:avLst/>
+          </a:prstGeom>
+        </p:spPr>
+      </p:pic>
+      <p:pic>
+        <p:nvPicPr>
+          <p:cNvPr id="6" name="図 5">
+            <a:extLst>
+              <a:ext uri="{FF2B5EF4-FFF2-40B4-BE49-F238E27FC236}">
+                <a16:creationId xmlns:a16="http://schemas.microsoft.com/office/drawing/2014/main" id="{4463732B-E236-545F-7271-673C8C8736D0}"/>
+              </a:ext>
+            </a:extLst>
+          </p:cNvPr>
+          <p:cNvPicPr>
+            <a:picLocks noChangeAspect="1"/>
+          </p:cNvPicPr>
+          <p:nvPr/>
+        </p:nvPicPr>
+        <p:blipFill>
+          <a:blip r:embed="rId3">
+            <a:extLst>
+              <a:ext uri="{28A0092B-C50C-407E-A947-70E740481C1C}">
+                <a14:useLocalDpi xmlns:a14="http://schemas.microsoft.com/office/drawing/2010/main" val="0"/>
+              </a:ext>
+            </a:extLst>
+          </a:blip>
+          <a:stretch>
+            <a:fillRect/>
+          </a:stretch>
+        </p:blipFill>
+        <p:spPr>
+          <a:xfrm>
+            <a:off x="3751320" y="4041803"/>
+            <a:ext cx="851779" cy="184964"/>
+          </a:xfrm>
+          <a:prstGeom prst="rect">
+            <a:avLst/>
+          </a:prstGeom>
+        </p:spPr>
+      </p:pic>
+      <p:sp>
+        <p:nvSpPr>
+          <p:cNvPr id="7" name="正方形/長方形 6">
+            <a:extLst>
+              <a:ext uri="{FF2B5EF4-FFF2-40B4-BE49-F238E27FC236}">
+                <a16:creationId xmlns:a16="http://schemas.microsoft.com/office/drawing/2014/main" id="{31B00AE9-F4BE-EC07-F543-D05A65DE91B3}"/>
+              </a:ext>
+            </a:extLst>
+          </p:cNvPr>
+          <p:cNvSpPr/>
+          <p:nvPr/>
+        </p:nvSpPr>
+        <p:spPr>
+          <a:xfrm flipV="1">
+            <a:off x="5483999" y="2023478"/>
+            <a:ext cx="254328" cy="234529"/>
+          </a:xfrm>
+          <a:prstGeom prst="rect">
+            <a:avLst/>
+          </a:prstGeom>
+          <a:noFill/>
+          <a:ln w="28575">
+            <a:solidFill>
+              <a:srgbClr val="FF0000"/>
+            </a:solidFill>
+          </a:ln>
+        </p:spPr>
+        <p:style>
+          <a:lnRef idx="2">
+            <a:schemeClr val="accent6"/>
+          </a:lnRef>
+          <a:fillRef idx="1">
+            <a:schemeClr val="lt1"/>
+          </a:fillRef>
+          <a:effectRef idx="0">
+            <a:schemeClr val="accent6"/>
+          </a:effectRef>
+          <a:fontRef idx="minor">
+            <a:schemeClr val="dk1"/>
+          </a:fontRef>
+        </p:style>
+        <p:txBody>
+          <a:bodyPr rtlCol="0" anchor="ctr"/>
+          <a:lstStyle/>
+          <a:p>
+            <a:pPr algn="ctr"/>
+            <a:endParaRPr kumimoji="1" lang="ja-JP" altLang="en-US"/>
+          </a:p>
+        </p:txBody>
+      </p:sp>
+      <p:sp>
+        <p:nvSpPr>
+          <p:cNvPr id="8" name="正方形/長方形 7">
+            <a:extLst>
+              <a:ext uri="{FF2B5EF4-FFF2-40B4-BE49-F238E27FC236}">
+                <a16:creationId xmlns:a16="http://schemas.microsoft.com/office/drawing/2014/main" id="{E8A31B76-AF1F-BA29-DE9C-C6CFB56E49E6}"/>
+              </a:ext>
+            </a:extLst>
+          </p:cNvPr>
+          <p:cNvSpPr/>
+          <p:nvPr/>
+        </p:nvSpPr>
+        <p:spPr>
+          <a:xfrm flipV="1">
+            <a:off x="5738327" y="4997186"/>
+            <a:ext cx="2360644" cy="298713"/>
+          </a:xfrm>
+          <a:prstGeom prst="rect">
+            <a:avLst/>
+          </a:prstGeom>
+          <a:noFill/>
+          <a:ln w="28575">
+            <a:solidFill>
+              <a:srgbClr val="FF0000"/>
+            </a:solidFill>
+          </a:ln>
+        </p:spPr>
+        <p:style>
+          <a:lnRef idx="2">
+            <a:schemeClr val="accent6"/>
+          </a:lnRef>
+          <a:fillRef idx="1">
+            <a:schemeClr val="lt1"/>
+          </a:fillRef>
+          <a:effectRef idx="0">
+            <a:schemeClr val="accent6"/>
+          </a:effectRef>
+          <a:fontRef idx="minor">
+            <a:schemeClr val="dk1"/>
+          </a:fontRef>
+        </p:style>
+        <p:txBody>
+          <a:bodyPr rtlCol="0" anchor="ctr"/>
+          <a:lstStyle/>
+          <a:p>
+            <a:pPr algn="ctr"/>
+            <a:endParaRPr kumimoji="1" lang="ja-JP" altLang="en-US"/>
+          </a:p>
+        </p:txBody>
+      </p:sp>
+      <p:sp>
+        <p:nvSpPr>
+          <p:cNvPr id="9" name="正方形/長方形 8">
+            <a:extLst>
+              <a:ext uri="{FF2B5EF4-FFF2-40B4-BE49-F238E27FC236}">
+                <a16:creationId xmlns:a16="http://schemas.microsoft.com/office/drawing/2014/main" id="{E55F9EF4-CE5C-69C8-F4C1-FA739A00DC37}"/>
+              </a:ext>
+            </a:extLst>
+          </p:cNvPr>
+          <p:cNvSpPr/>
+          <p:nvPr/>
+        </p:nvSpPr>
+        <p:spPr>
+          <a:xfrm flipV="1">
+            <a:off x="8098971" y="2574338"/>
+            <a:ext cx="2202316" cy="298712"/>
+          </a:xfrm>
+          <a:prstGeom prst="rect">
+            <a:avLst/>
+          </a:prstGeom>
+          <a:noFill/>
+          <a:ln w="28575">
+            <a:solidFill>
+              <a:srgbClr val="FF0000"/>
+            </a:solidFill>
+          </a:ln>
+        </p:spPr>
+        <p:style>
+          <a:lnRef idx="2">
+            <a:schemeClr val="accent6"/>
+          </a:lnRef>
+          <a:fillRef idx="1">
+            <a:schemeClr val="lt1"/>
+          </a:fillRef>
+          <a:effectRef idx="0">
+            <a:schemeClr val="accent6"/>
+          </a:effectRef>
+          <a:fontRef idx="minor">
+            <a:schemeClr val="dk1"/>
+          </a:fontRef>
+        </p:style>
+        <p:txBody>
+          <a:bodyPr rtlCol="0" anchor="ctr"/>
+          <a:lstStyle/>
+          <a:p>
+            <a:pPr algn="ctr"/>
+            <a:endParaRPr kumimoji="1" lang="ja-JP" altLang="en-US"/>
+          </a:p>
+        </p:txBody>
+      </p:sp>
+    </p:spTree>
+    <p:extLst>
+      <p:ext uri="{BB962C8B-B14F-4D97-AF65-F5344CB8AC3E}">
+        <p14:creationId xmlns:p14="http://schemas.microsoft.com/office/powerpoint/2010/main" val="2630372201"/>
+      </p:ext>
+    </p:extLst>
+  </p:cSld>
+  <p:clrMapOvr>
+    <a:masterClrMapping/>
+  </p:clrMapOvr>
+</p:sld>
+</file>
+
+<file path=ppt/slides/slide39.xml><?xml version="1.0" encoding="utf-8"?>
+<p:sld xmlns:a="http://schemas.openxmlformats.org/drawingml/2006/main" xmlns:r="http://schemas.openxmlformats.org/officeDocument/2006/relationships" xmlns:p="http://schemas.openxmlformats.org/presentationml/2006/main">
+  <p:cSld>
+    <p:spTree>
+      <p:nvGrpSpPr>
+        <p:cNvPr id="1" name="">
+          <a:extLst>
+            <a:ext uri="{FF2B5EF4-FFF2-40B4-BE49-F238E27FC236}">
+              <a16:creationId xmlns:a16="http://schemas.microsoft.com/office/drawing/2014/main" id="{367A3736-E9F0-93F9-D1C6-6EBAD0C3243E}"/>
+            </a:ext>
+          </a:extLst>
+        </p:cNvPr>
+        <p:cNvGrpSpPr/>
+        <p:nvPr/>
+      </p:nvGrpSpPr>
+      <p:grpSpPr>
+        <a:xfrm>
+          <a:off x="0" y="0"/>
+          <a:ext cx="0" cy="0"/>
+          <a:chOff x="0" y="0"/>
+          <a:chExt cx="0" cy="0"/>
+        </a:xfrm>
+      </p:grpSpPr>
+      <p:pic>
+        <p:nvPicPr>
+          <p:cNvPr id="5" name="図 4">
+            <a:extLst>
+              <a:ext uri="{FF2B5EF4-FFF2-40B4-BE49-F238E27FC236}">
+                <a16:creationId xmlns:a16="http://schemas.microsoft.com/office/drawing/2014/main" id="{616D8E1A-B84E-C219-8875-97BD80F57A03}"/>
+              </a:ext>
+            </a:extLst>
+          </p:cNvPr>
+          <p:cNvPicPr>
+            <a:picLocks noChangeAspect="1"/>
+          </p:cNvPicPr>
+          <p:nvPr/>
+        </p:nvPicPr>
+        <p:blipFill>
+          <a:blip r:embed="rId2">
+            <a:extLst>
+              <a:ext uri="{28A0092B-C50C-407E-A947-70E740481C1C}">
+                <a14:useLocalDpi xmlns:a14="http://schemas.microsoft.com/office/drawing/2010/main" val="0"/>
+              </a:ext>
+            </a:extLst>
+          </a:blip>
+          <a:stretch>
+            <a:fillRect/>
+          </a:stretch>
+        </p:blipFill>
+        <p:spPr>
+          <a:xfrm>
+            <a:off x="888187" y="3021787"/>
+            <a:ext cx="10715625" cy="1114425"/>
+          </a:xfrm>
+          <a:prstGeom prst="rect">
+            <a:avLst/>
+          </a:prstGeom>
+        </p:spPr>
+      </p:pic>
+      <p:pic>
+        <p:nvPicPr>
+          <p:cNvPr id="2" name="図 1">
+            <a:extLst>
+              <a:ext uri="{FF2B5EF4-FFF2-40B4-BE49-F238E27FC236}">
+                <a16:creationId xmlns:a16="http://schemas.microsoft.com/office/drawing/2014/main" id="{3EC70D86-0082-54C3-3F6D-50510506CBCF}"/>
+              </a:ext>
+            </a:extLst>
+          </p:cNvPr>
+          <p:cNvPicPr>
+            <a:picLocks noChangeAspect="1"/>
+          </p:cNvPicPr>
+          <p:nvPr/>
+        </p:nvPicPr>
+        <p:blipFill>
+          <a:blip r:embed="rId3">
+            <a:extLst>
+              <a:ext uri="{28A0092B-C50C-407E-A947-70E740481C1C}">
+                <a14:useLocalDpi xmlns:a14="http://schemas.microsoft.com/office/drawing/2010/main" val="0"/>
+              </a:ext>
+            </a:extLst>
+          </a:blip>
+          <a:stretch>
+            <a:fillRect/>
+          </a:stretch>
+        </p:blipFill>
+        <p:spPr>
+          <a:xfrm>
+            <a:off x="4628397" y="3855191"/>
+            <a:ext cx="851779" cy="184964"/>
+          </a:xfrm>
+          <a:prstGeom prst="rect">
+            <a:avLst/>
+          </a:prstGeom>
+        </p:spPr>
+      </p:pic>
+      <p:sp>
+        <p:nvSpPr>
+          <p:cNvPr id="3" name="正方形/長方形 2">
+            <a:extLst>
+              <a:ext uri="{FF2B5EF4-FFF2-40B4-BE49-F238E27FC236}">
+                <a16:creationId xmlns:a16="http://schemas.microsoft.com/office/drawing/2014/main" id="{17C8C1C1-FCED-C861-E4B5-53C553766EFA}"/>
+              </a:ext>
+            </a:extLst>
+          </p:cNvPr>
+          <p:cNvSpPr/>
+          <p:nvPr/>
+        </p:nvSpPr>
+        <p:spPr>
+          <a:xfrm flipV="1">
+            <a:off x="4497355" y="3556478"/>
+            <a:ext cx="7007289" cy="221318"/>
+          </a:xfrm>
+          <a:prstGeom prst="rect">
+            <a:avLst/>
+          </a:prstGeom>
+          <a:noFill/>
+          <a:ln w="28575">
+            <a:solidFill>
+              <a:srgbClr val="FF0000"/>
+            </a:solidFill>
+          </a:ln>
+        </p:spPr>
+        <p:style>
+          <a:lnRef idx="2">
+            <a:schemeClr val="accent6"/>
+          </a:lnRef>
+          <a:fillRef idx="1">
+            <a:schemeClr val="lt1"/>
+          </a:fillRef>
+          <a:effectRef idx="0">
+            <a:schemeClr val="accent6"/>
+          </a:effectRef>
+          <a:fontRef idx="minor">
+            <a:schemeClr val="dk1"/>
+          </a:fontRef>
+        </p:style>
+        <p:txBody>
+          <a:bodyPr rtlCol="0" anchor="ctr"/>
+          <a:lstStyle/>
+          <a:p>
+            <a:pPr algn="ctr"/>
+            <a:endParaRPr kumimoji="1" lang="ja-JP" altLang="en-US"/>
+          </a:p>
+        </p:txBody>
+      </p:sp>
+    </p:spTree>
+    <p:extLst>
+      <p:ext uri="{BB962C8B-B14F-4D97-AF65-F5344CB8AC3E}">
+        <p14:creationId xmlns:p14="http://schemas.microsoft.com/office/powerpoint/2010/main" val="2549257691"/>
       </p:ext>
     </p:extLst>
   </p:cSld>
@@ -5542,6 +8231,200 @@
     <p:extLst>
       <p:ext uri="{BB962C8B-B14F-4D97-AF65-F5344CB8AC3E}">
         <p14:creationId xmlns:p14="http://schemas.microsoft.com/office/powerpoint/2010/main" val="1093528305"/>
+      </p:ext>
+    </p:extLst>
+  </p:cSld>
+  <p:clrMapOvr>
+    <a:masterClrMapping/>
+  </p:clrMapOvr>
+</p:sld>
+</file>
+
+<file path=ppt/slides/slide40.xml><?xml version="1.0" encoding="utf-8"?>
+<p:sld xmlns:a="http://schemas.openxmlformats.org/drawingml/2006/main" xmlns:r="http://schemas.openxmlformats.org/officeDocument/2006/relationships" xmlns:p="http://schemas.openxmlformats.org/presentationml/2006/main">
+  <p:cSld>
+    <p:spTree>
+      <p:nvGrpSpPr>
+        <p:cNvPr id="1" name="">
+          <a:extLst>
+            <a:ext uri="{FF2B5EF4-FFF2-40B4-BE49-F238E27FC236}">
+              <a16:creationId xmlns:a16="http://schemas.microsoft.com/office/drawing/2014/main" id="{2521F0A1-7F4B-0255-3527-7F6E8F756A20}"/>
+            </a:ext>
+          </a:extLst>
+        </p:cNvPr>
+        <p:cNvGrpSpPr/>
+        <p:nvPr/>
+      </p:nvGrpSpPr>
+      <p:grpSpPr>
+        <a:xfrm>
+          <a:off x="0" y="0"/>
+          <a:ext cx="0" cy="0"/>
+          <a:chOff x="0" y="0"/>
+          <a:chExt cx="0" cy="0"/>
+        </a:xfrm>
+      </p:grpSpPr>
+      <p:pic>
+        <p:nvPicPr>
+          <p:cNvPr id="6" name="図 5">
+            <a:extLst>
+              <a:ext uri="{FF2B5EF4-FFF2-40B4-BE49-F238E27FC236}">
+                <a16:creationId xmlns:a16="http://schemas.microsoft.com/office/drawing/2014/main" id="{AEB55F0E-08A8-FF76-02F8-F7FFCCFDA96D}"/>
+              </a:ext>
+            </a:extLst>
+          </p:cNvPr>
+          <p:cNvPicPr>
+            <a:picLocks noChangeAspect="1"/>
+          </p:cNvPicPr>
+          <p:nvPr/>
+        </p:nvPicPr>
+        <p:blipFill>
+          <a:blip r:embed="rId2">
+            <a:extLst>
+              <a:ext uri="{28A0092B-C50C-407E-A947-70E740481C1C}">
+                <a14:useLocalDpi xmlns:a14="http://schemas.microsoft.com/office/drawing/2010/main" val="0"/>
+              </a:ext>
+            </a:extLst>
+          </a:blip>
+          <a:stretch>
+            <a:fillRect/>
+          </a:stretch>
+        </p:blipFill>
+        <p:spPr>
+          <a:xfrm>
+            <a:off x="4076700" y="1604962"/>
+            <a:ext cx="4038600" cy="3648075"/>
+          </a:xfrm>
+          <a:prstGeom prst="rect">
+            <a:avLst/>
+          </a:prstGeom>
+        </p:spPr>
+      </p:pic>
+      <p:pic>
+        <p:nvPicPr>
+          <p:cNvPr id="3" name="図 2">
+            <a:extLst>
+              <a:ext uri="{FF2B5EF4-FFF2-40B4-BE49-F238E27FC236}">
+                <a16:creationId xmlns:a16="http://schemas.microsoft.com/office/drawing/2014/main" id="{3FD45118-6685-CA47-CF0D-EC19673FE56E}"/>
+              </a:ext>
+            </a:extLst>
+          </p:cNvPr>
+          <p:cNvPicPr>
+            <a:picLocks noChangeAspect="1"/>
+          </p:cNvPicPr>
+          <p:nvPr/>
+        </p:nvPicPr>
+        <p:blipFill>
+          <a:blip r:embed="rId3">
+            <a:extLst>
+              <a:ext uri="{28A0092B-C50C-407E-A947-70E740481C1C}">
+                <a14:useLocalDpi xmlns:a14="http://schemas.microsoft.com/office/drawing/2010/main" val="0"/>
+              </a:ext>
+            </a:extLst>
+          </a:blip>
+          <a:stretch>
+            <a:fillRect/>
+          </a:stretch>
+        </p:blipFill>
+        <p:spPr>
+          <a:xfrm>
+            <a:off x="5804251" y="4388752"/>
+            <a:ext cx="851779" cy="184964"/>
+          </a:xfrm>
+          <a:prstGeom prst="rect">
+            <a:avLst/>
+          </a:prstGeom>
+        </p:spPr>
+      </p:pic>
+      <p:pic>
+        <p:nvPicPr>
+          <p:cNvPr id="4" name="図 3">
+            <a:extLst>
+              <a:ext uri="{FF2B5EF4-FFF2-40B4-BE49-F238E27FC236}">
+                <a16:creationId xmlns:a16="http://schemas.microsoft.com/office/drawing/2014/main" id="{7DEF6B29-FF32-1E0A-8B6D-83993B90CCC0}"/>
+              </a:ext>
+            </a:extLst>
+          </p:cNvPr>
+          <p:cNvPicPr>
+            <a:picLocks noChangeAspect="1"/>
+          </p:cNvPicPr>
+          <p:nvPr/>
+        </p:nvPicPr>
+        <p:blipFill>
+          <a:blip r:embed="rId3">
+            <a:extLst>
+              <a:ext uri="{28A0092B-C50C-407E-A947-70E740481C1C}">
+                <a14:useLocalDpi xmlns:a14="http://schemas.microsoft.com/office/drawing/2010/main" val="0"/>
+              </a:ext>
+            </a:extLst>
+          </a:blip>
+          <a:stretch>
+            <a:fillRect/>
+          </a:stretch>
+        </p:blipFill>
+        <p:spPr>
+          <a:xfrm>
+            <a:off x="5918063" y="4649102"/>
+            <a:ext cx="851779" cy="184964"/>
+          </a:xfrm>
+          <a:prstGeom prst="rect">
+            <a:avLst/>
+          </a:prstGeom>
+        </p:spPr>
+      </p:pic>
+      <p:sp>
+        <p:nvSpPr>
+          <p:cNvPr id="2" name="正方形/長方形 1">
+            <a:extLst>
+              <a:ext uri="{FF2B5EF4-FFF2-40B4-BE49-F238E27FC236}">
+                <a16:creationId xmlns:a16="http://schemas.microsoft.com/office/drawing/2014/main" id="{BC519530-8899-1EBC-1B9B-7CEB3054B5BD}"/>
+              </a:ext>
+            </a:extLst>
+          </p:cNvPr>
+          <p:cNvSpPr/>
+          <p:nvPr/>
+        </p:nvSpPr>
+        <p:spPr>
+          <a:xfrm flipV="1">
+            <a:off x="4572607" y="4348059"/>
+            <a:ext cx="3492000" cy="252000"/>
+          </a:xfrm>
+          <a:prstGeom prst="rect">
+            <a:avLst/>
+          </a:prstGeom>
+          <a:noFill/>
+          <a:ln w="28575">
+            <a:solidFill>
+              <a:srgbClr val="FF0000"/>
+            </a:solidFill>
+          </a:ln>
+        </p:spPr>
+        <p:style>
+          <a:lnRef idx="2">
+            <a:schemeClr val="accent6"/>
+          </a:lnRef>
+          <a:fillRef idx="1">
+            <a:schemeClr val="lt1"/>
+          </a:fillRef>
+          <a:effectRef idx="0">
+            <a:schemeClr val="accent6"/>
+          </a:effectRef>
+          <a:fontRef idx="minor">
+            <a:schemeClr val="dk1"/>
+          </a:fontRef>
+        </p:style>
+        <p:txBody>
+          <a:bodyPr rtlCol="0" anchor="ctr"/>
+          <a:lstStyle/>
+          <a:p>
+            <a:pPr algn="ctr"/>
+            <a:endParaRPr kumimoji="1" lang="ja-JP" altLang="en-US"/>
+          </a:p>
+        </p:txBody>
+      </p:sp>
+    </p:spTree>
+    <p:extLst>
+      <p:ext uri="{BB962C8B-B14F-4D97-AF65-F5344CB8AC3E}">
+        <p14:creationId xmlns:p14="http://schemas.microsoft.com/office/powerpoint/2010/main" val="1477939139"/>
       </p:ext>
     </p:extLst>
   </p:cSld>
